--- a/График_запуска_RTR.pptx
+++ b/График_запуска_RTR.pptx
@@ -7,7 +7,6 @@
   <p:sldIdLst>
     <p:sldId id="256" r:id="rId7"/>
     <p:sldId id="257" r:id="rId8"/>
-    <p:sldId id="258" r:id="rId9"/>
   </p:sldIdLst>
   <p:sldSz cx="12191695" cy="6858000" type="screen4x3"/>
   <p:notesSz cx="6858000" cy="9144000"/>
@@ -3083,127 +3082,6 @@
 <file path=ppt/slides/slide1.xml><?xml version="1.0" encoding="utf-8"?>
 <p:sld xmlns:a="http://schemas.openxmlformats.org/drawingml/2006/main" xmlns:p="http://schemas.openxmlformats.org/presentationml/2006/main" xmlns:r="http://schemas.openxmlformats.org/officeDocument/2006/relationships">
   <p:cSld>
-    <p:bg>
-      <p:bgPr>
-        <a:solidFill>
-          <a:srgbClr val="FDF5F6"/>
-        </a:solidFill>
-        <a:effectLst/>
-      </p:bgPr>
-    </p:bg>
-    <p:spTree>
-      <p:nvGrpSpPr>
-        <p:cNvPr id="1" name=""/>
-        <p:cNvGrpSpPr/>
-        <p:nvPr/>
-      </p:nvGrpSpPr>
-      <p:grpSpPr/>
-      <p:sp>
-        <p:nvSpPr>
-          <p:cNvPr id="2" name="TextBox 1"/>
-          <p:cNvSpPr txBox="1"/>
-          <p:nvPr/>
-        </p:nvSpPr>
-        <p:spPr>
-          <a:xfrm>
-            <a:off x="533095" y="2194560"/>
-            <a:ext cx="7772400" cy="1097280"/>
-          </a:xfrm>
-          <a:prstGeom prst="rect">
-            <a:avLst/>
-          </a:prstGeom>
-          <a:noFill/>
-        </p:spPr>
-        <p:txBody>
-          <a:bodyPr wrap="none">
-            <a:spAutoFit/>
-          </a:bodyPr>
-          <a:lstStyle/>
-          <a:p>
-            <a:pPr algn="l"/>
-            <a:r>
-              <a:rPr sz="3200" b="1">
-                <a:solidFill>
-                  <a:srgbClr val="831223"/>
-                </a:solidFill>
-                <a:latin typeface="Verdana"/>
-              </a:rPr>
-              <a:t>ГРАФИК ЗАПУСКА</a:t>
-            </a:r>
-          </a:p>
-        </p:txBody>
-      </p:sp>
-      <p:sp>
-        <p:nvSpPr>
-          <p:cNvPr id="3" name="TextBox 2"/>
-          <p:cNvSpPr txBox="1"/>
-          <p:nvPr/>
-        </p:nvSpPr>
-        <p:spPr>
-          <a:xfrm>
-            <a:off x="533095" y="3200400"/>
-            <a:ext cx="8229600" cy="731520"/>
-          </a:xfrm>
-          <a:prstGeom prst="rect">
-            <a:avLst/>
-          </a:prstGeom>
-          <a:noFill/>
-        </p:spPr>
-        <p:txBody>
-          <a:bodyPr wrap="none">
-            <a:spAutoFit/>
-          </a:bodyPr>
-          <a:lstStyle/>
-          <a:p>
-            <a:pPr algn="l"/>
-            <a:r>
-              <a:rPr sz="1600" b="0">
-                <a:solidFill>
-                  <a:srgbClr val="77777A"/>
-                </a:solidFill>
-                <a:latin typeface="Verdana"/>
-              </a:rPr>
-              <a:t>RTR — управленческий учёт
-MTD и продуктивный контур</a:t>
-            </a:r>
-          </a:p>
-        </p:txBody>
-      </p:sp>
-      <p:pic>
-        <p:nvPicPr>
-          <p:cNvPr id="4" name="Picture 3" descr="logo_0.png"/>
-          <p:cNvPicPr>
-            <a:picLocks noChangeAspect="1"/>
-          </p:cNvPicPr>
-          <p:nvPr/>
-        </p:nvPicPr>
-        <p:blipFill>
-          <a:blip r:embed="rId2"/>
-          <a:stretch>
-            <a:fillRect/>
-          </a:stretch>
-        </p:blipFill>
-        <p:spPr>
-          <a:xfrm>
-            <a:off x="9377172" y="102412"/>
-            <a:ext cx="2423160" cy="893618"/>
-          </a:xfrm>
-          <a:prstGeom prst="rect">
-            <a:avLst/>
-          </a:prstGeom>
-        </p:spPr>
-      </p:pic>
-    </p:spTree>
-  </p:cSld>
-  <p:clrMapOvr>
-    <a:masterClrMapping/>
-  </p:clrMapOvr>
-</p:sld>
-</file>
-
-<file path=ppt/slides/slide2.xml><?xml version="1.0" encoding="utf-8"?>
-<p:sld xmlns:a="http://schemas.openxmlformats.org/drawingml/2006/main" xmlns:p="http://schemas.openxmlformats.org/presentationml/2006/main" xmlns:r="http://schemas.openxmlformats.org/officeDocument/2006/relationships">
-  <p:cSld>
     <p:spTree>
       <p:nvGrpSpPr>
         <p:cNvPr id="1" name=""/>
@@ -3327,7 +3205,7 @@
                       <a:r>
                         <a:rPr sz="700" b="1">
                           <a:solidFill>
-                            <a:srgbClr val="641E28"/>
+                            <a:srgbClr val="FFFFFF"/>
                           </a:solidFill>
                           <a:latin typeface="Calibri"/>
                         </a:rPr>
@@ -3337,7 +3215,7 @@
                   </a:txBody>
                   <a:tcPr anchor="ctr" marL="25400" marR="25400" marT="12700" marB="12700">
                     <a:solidFill>
-                      <a:srgbClr val="F5B4BC"/>
+                      <a:srgbClr val="570C17"/>
                     </a:solidFill>
                     <a:lnL w="6350" cap="flat" cmpd="sng" algn="ctr">
                       <a:solidFill>
@@ -3380,7 +3258,7 @@
                       <a:r>
                         <a:rPr sz="700" b="1">
                           <a:solidFill>
-                            <a:srgbClr val="641E28"/>
+                            <a:srgbClr val="FFFFFF"/>
                           </a:solidFill>
                           <a:latin typeface="Calibri"/>
                         </a:rPr>
@@ -3390,7 +3268,7 @@
                   </a:txBody>
                   <a:tcPr anchor="ctr" marL="25400" marR="25400" marT="12700" marB="12700">
                     <a:solidFill>
-                      <a:srgbClr val="F5B4BC"/>
+                      <a:srgbClr val="570C17"/>
                     </a:solidFill>
                     <a:lnL w="6350" cap="flat" cmpd="sng" algn="ctr">
                       <a:solidFill>
@@ -3433,7 +3311,7 @@
                       <a:r>
                         <a:rPr sz="700" b="1">
                           <a:solidFill>
-                            <a:srgbClr val="641E28"/>
+                            <a:srgbClr val="FFFFFF"/>
                           </a:solidFill>
                           <a:latin typeface="Calibri"/>
                         </a:rPr>
@@ -3443,7 +3321,7 @@
                   </a:txBody>
                   <a:tcPr anchor="ctr" marL="25400" marR="25400" marT="12700" marB="12700">
                     <a:solidFill>
-                      <a:srgbClr val="FCDCE0"/>
+                      <a:srgbClr val="570C17"/>
                     </a:solidFill>
                     <a:lnL w="6350" cap="flat" cmpd="sng" algn="ctr">
                       <a:solidFill>
@@ -3631,7 +3509,7 @@
                       <a:r>
                         <a:rPr sz="700" b="1">
                           <a:solidFill>
-                            <a:srgbClr val="641E28"/>
+                            <a:srgbClr val="FFFFFF"/>
                           </a:solidFill>
                           <a:latin typeface="Calibri"/>
                         </a:rPr>
@@ -3641,7 +3519,7 @@
                   </a:txBody>
                   <a:tcPr anchor="ctr" marL="25400" marR="25400" marT="12700" marB="12700">
                     <a:solidFill>
-                      <a:srgbClr val="FCDCE0"/>
+                      <a:srgbClr val="570C17"/>
                     </a:solidFill>
                     <a:lnL w="6350" cap="flat" cmpd="sng" algn="ctr">
                       <a:solidFill>
@@ -3742,7 +3620,7 @@
                       <a:r>
                         <a:rPr sz="700" b="1">
                           <a:solidFill>
-                            <a:srgbClr val="641E28"/>
+                            <a:srgbClr val="FFFFFF"/>
                           </a:solidFill>
                           <a:latin typeface="Calibri"/>
                         </a:rPr>
@@ -3752,7 +3630,7 @@
                   </a:txBody>
                   <a:tcPr anchor="ctr" marL="25400" marR="25400" marT="12700" marB="12700">
                     <a:solidFill>
-                      <a:srgbClr val="FCDCE0"/>
+                      <a:srgbClr val="570C17"/>
                     </a:solidFill>
                     <a:lnL w="6350" cap="flat" cmpd="sng" algn="ctr">
                       <a:solidFill>
@@ -3795,7 +3673,7 @@
                       <a:r>
                         <a:rPr sz="700" b="1">
                           <a:solidFill>
-                            <a:srgbClr val="641E28"/>
+                            <a:srgbClr val="FFFFFF"/>
                           </a:solidFill>
                           <a:latin typeface="Calibri"/>
                         </a:rPr>
@@ -3805,7 +3683,7 @@
                   </a:txBody>
                   <a:tcPr anchor="ctr" marL="25400" marR="25400" marT="12700" marB="12700">
                     <a:solidFill>
-                      <a:srgbClr val="FCDCE0"/>
+                      <a:srgbClr val="570C17"/>
                     </a:solidFill>
                     <a:lnL w="6350" cap="flat" cmpd="sng" algn="ctr">
                       <a:solidFill>
@@ -4024,7 +3902,7 @@
                       <a:r>
                         <a:rPr sz="600" b="1">
                           <a:solidFill>
-                            <a:srgbClr val="641E28"/>
+                            <a:srgbClr val="FFFFFF"/>
                           </a:solidFill>
                           <a:latin typeface="Calibri"/>
                         </a:rPr>
@@ -4034,7 +3912,7 @@
                   </a:txBody>
                   <a:tcPr anchor="ctr" marL="25400" marR="25400" marT="12700" marB="12700">
                     <a:solidFill>
-                      <a:srgbClr val="F5B4BC"/>
+                      <a:srgbClr val="570C17"/>
                     </a:solidFill>
                     <a:lnL w="6350" cap="flat" cmpd="sng" algn="ctr">
                       <a:solidFill>
@@ -4077,7 +3955,7 @@
                       <a:r>
                         <a:rPr sz="600" b="1">
                           <a:solidFill>
-                            <a:srgbClr val="641E28"/>
+                            <a:srgbClr val="FFFFFF"/>
                           </a:solidFill>
                           <a:latin typeface="Calibri"/>
                         </a:rPr>
@@ -4087,7 +3965,7 @@
                   </a:txBody>
                   <a:tcPr anchor="ctr" marL="25400" marR="25400" marT="12700" marB="12700">
                     <a:solidFill>
-                      <a:srgbClr val="F5B4BC"/>
+                      <a:srgbClr val="570C17"/>
                     </a:solidFill>
                     <a:lnL w="6350" cap="flat" cmpd="sng" algn="ctr">
                       <a:solidFill>
@@ -4130,7 +4008,7 @@
                       <a:r>
                         <a:rPr sz="600" b="1">
                           <a:solidFill>
-                            <a:srgbClr val="641E28"/>
+                            <a:srgbClr val="FFFFFF"/>
                           </a:solidFill>
                           <a:latin typeface="Calibri"/>
                         </a:rPr>
@@ -4140,7 +4018,7 @@
                   </a:txBody>
                   <a:tcPr anchor="ctr" marL="25400" marR="25400" marT="12700" marB="12700">
                     <a:solidFill>
-                      <a:srgbClr val="F5B4BC"/>
+                      <a:srgbClr val="570C17"/>
                     </a:solidFill>
                     <a:lnL w="6350" cap="flat" cmpd="sng" algn="ctr">
                       <a:solidFill>
@@ -4183,7 +4061,7 @@
                       <a:r>
                         <a:rPr sz="600" b="1">
                           <a:solidFill>
-                            <a:srgbClr val="641E28"/>
+                            <a:srgbClr val="FFFFFF"/>
                           </a:solidFill>
                           <a:latin typeface="Calibri"/>
                         </a:rPr>
@@ -4193,7 +4071,7 @@
                   </a:txBody>
                   <a:tcPr anchor="ctr" marL="25400" marR="25400" marT="12700" marB="12700">
                     <a:solidFill>
-                      <a:srgbClr val="F5B4BC"/>
+                      <a:srgbClr val="570C17"/>
                     </a:solidFill>
                     <a:lnL w="6350" cap="flat" cmpd="sng" algn="ctr">
                       <a:solidFill>
@@ -4236,7 +4114,7 @@
                       <a:r>
                         <a:rPr sz="600" b="1">
                           <a:solidFill>
-                            <a:srgbClr val="641E28"/>
+                            <a:srgbClr val="FFFFFF"/>
                           </a:solidFill>
                           <a:latin typeface="Calibri"/>
                         </a:rPr>
@@ -4246,7 +4124,7 @@
                   </a:txBody>
                   <a:tcPr anchor="ctr" marL="25400" marR="25400" marT="12700" marB="12700">
                     <a:solidFill>
-                      <a:srgbClr val="F5B4BC"/>
+                      <a:srgbClr val="570C17"/>
                     </a:solidFill>
                     <a:lnL w="6350" cap="flat" cmpd="sng" algn="ctr">
                       <a:solidFill>
@@ -4289,7 +4167,7 @@
                       <a:r>
                         <a:rPr sz="600" b="1">
                           <a:solidFill>
-                            <a:srgbClr val="641E28"/>
+                            <a:srgbClr val="FFFFFF"/>
                           </a:solidFill>
                           <a:latin typeface="Calibri"/>
                         </a:rPr>
@@ -4299,7 +4177,7 @@
                   </a:txBody>
                   <a:tcPr anchor="ctr" marL="25400" marR="25400" marT="12700" marB="12700">
                     <a:solidFill>
-                      <a:srgbClr val="F5B4BC"/>
+                      <a:srgbClr val="570C17"/>
                     </a:solidFill>
                     <a:lnL w="6350" cap="flat" cmpd="sng" algn="ctr">
                       <a:solidFill>
@@ -4342,7 +4220,7 @@
                       <a:r>
                         <a:rPr sz="600" b="1">
                           <a:solidFill>
-                            <a:srgbClr val="641E28"/>
+                            <a:srgbClr val="FFFFFF"/>
                           </a:solidFill>
                           <a:latin typeface="Calibri"/>
                         </a:rPr>
@@ -4352,7 +4230,7 @@
                   </a:txBody>
                   <a:tcPr anchor="ctr" marL="25400" marR="25400" marT="12700" marB="12700">
                     <a:solidFill>
-                      <a:srgbClr val="F5B4BC"/>
+                      <a:srgbClr val="570C17"/>
                     </a:solidFill>
                     <a:lnL w="6350" cap="flat" cmpd="sng" algn="ctr">
                       <a:solidFill>
@@ -4395,7 +4273,7 @@
                       <a:r>
                         <a:rPr sz="600" b="1">
                           <a:solidFill>
-                            <a:srgbClr val="641E28"/>
+                            <a:srgbClr val="FFFFFF"/>
                           </a:solidFill>
                           <a:latin typeface="Calibri"/>
                         </a:rPr>
@@ -4405,7 +4283,7 @@
                   </a:txBody>
                   <a:tcPr anchor="ctr" marL="25400" marR="25400" marT="12700" marB="12700">
                     <a:solidFill>
-                      <a:srgbClr val="F5B4BC"/>
+                      <a:srgbClr val="570C17"/>
                     </a:solidFill>
                     <a:lnL w="6350" cap="flat" cmpd="sng" algn="ctr">
                       <a:solidFill>
@@ -4448,7 +4326,7 @@
                       <a:r>
                         <a:rPr sz="600" b="1">
                           <a:solidFill>
-                            <a:srgbClr val="641E28"/>
+                            <a:srgbClr val="FFFFFF"/>
                           </a:solidFill>
                           <a:latin typeface="Calibri"/>
                         </a:rPr>
@@ -4458,7 +4336,7 @@
                   </a:txBody>
                   <a:tcPr anchor="ctr" marL="25400" marR="25400" marT="12700" marB="12700">
                     <a:solidFill>
-                      <a:srgbClr val="F5B4BC"/>
+                      <a:srgbClr val="570C17"/>
                     </a:solidFill>
                     <a:lnL w="6350" cap="flat" cmpd="sng" algn="ctr">
                       <a:solidFill>
@@ -4501,7 +4379,7 @@
                       <a:r>
                         <a:rPr sz="600" b="1">
                           <a:solidFill>
-                            <a:srgbClr val="641E28"/>
+                            <a:srgbClr val="FFFFFF"/>
                           </a:solidFill>
                           <a:latin typeface="Calibri"/>
                         </a:rPr>
@@ -4511,7 +4389,7 @@
                   </a:txBody>
                   <a:tcPr anchor="ctr" marL="25400" marR="25400" marT="12700" marB="12700">
                     <a:solidFill>
-                      <a:srgbClr val="F5B4BC"/>
+                      <a:srgbClr val="570C17"/>
                     </a:solidFill>
                     <a:lnL w="6350" cap="flat" cmpd="sng" algn="ctr">
                       <a:solidFill>
@@ -4554,7 +4432,7 @@
                       <a:r>
                         <a:rPr sz="600" b="1">
                           <a:solidFill>
-                            <a:srgbClr val="641E28"/>
+                            <a:srgbClr val="FFFFFF"/>
                           </a:solidFill>
                           <a:latin typeface="Calibri"/>
                         </a:rPr>
@@ -4564,7 +4442,7 @@
                   </a:txBody>
                   <a:tcPr anchor="ctr" marL="25400" marR="25400" marT="12700" marB="12700">
                     <a:solidFill>
-                      <a:srgbClr val="F5B4BC"/>
+                      <a:srgbClr val="570C17"/>
                     </a:solidFill>
                     <a:lnL w="6350" cap="flat" cmpd="sng" algn="ctr">
                       <a:solidFill>
@@ -4607,7 +4485,7 @@
                       <a:r>
                         <a:rPr sz="600" b="1">
                           <a:solidFill>
-                            <a:srgbClr val="641E28"/>
+                            <a:srgbClr val="FFFFFF"/>
                           </a:solidFill>
                           <a:latin typeface="Calibri"/>
                         </a:rPr>
@@ -4617,7 +4495,7 @@
                   </a:txBody>
                   <a:tcPr anchor="ctr" marL="25400" marR="25400" marT="12700" marB="12700">
                     <a:solidFill>
-                      <a:srgbClr val="F5B4BC"/>
+                      <a:srgbClr val="570C17"/>
                     </a:solidFill>
                     <a:lnL w="6350" cap="flat" cmpd="sng" algn="ctr">
                       <a:solidFill>
@@ -4660,7 +4538,7 @@
                       <a:r>
                         <a:rPr sz="600" b="1">
                           <a:solidFill>
-                            <a:srgbClr val="641E28"/>
+                            <a:srgbClr val="FFFFFF"/>
                           </a:solidFill>
                           <a:latin typeface="Calibri"/>
                         </a:rPr>
@@ -4670,7 +4548,7 @@
                   </a:txBody>
                   <a:tcPr anchor="ctr" marL="25400" marR="25400" marT="12700" marB="12700">
                     <a:solidFill>
-                      <a:srgbClr val="F5B4BC"/>
+                      <a:srgbClr val="570C17"/>
                     </a:solidFill>
                     <a:lnL w="6350" cap="flat" cmpd="sng" algn="ctr">
                       <a:solidFill>
@@ -4713,7 +4591,7 @@
                       <a:r>
                         <a:rPr sz="600" b="1">
                           <a:solidFill>
-                            <a:srgbClr val="641E28"/>
+                            <a:srgbClr val="FFFFFF"/>
                           </a:solidFill>
                           <a:latin typeface="Calibri"/>
                         </a:rPr>
@@ -4723,7 +4601,7 @@
                   </a:txBody>
                   <a:tcPr anchor="ctr" marL="25400" marR="25400" marT="12700" marB="12700">
                     <a:solidFill>
-                      <a:srgbClr val="F5B4BC"/>
+                      <a:srgbClr val="570C17"/>
                     </a:solidFill>
                     <a:lnL w="6350" cap="flat" cmpd="sng" algn="ctr">
                       <a:solidFill>
@@ -4766,7 +4644,7 @@
                       <a:r>
                         <a:rPr sz="600" b="1">
                           <a:solidFill>
-                            <a:srgbClr val="641E28"/>
+                            <a:srgbClr val="FFFFFF"/>
                           </a:solidFill>
                           <a:latin typeface="Calibri"/>
                         </a:rPr>
@@ -4776,7 +4654,7 @@
                   </a:txBody>
                   <a:tcPr anchor="ctr" marL="25400" marR="25400" marT="12700" marB="12700">
                     <a:solidFill>
-                      <a:srgbClr val="F5B4BC"/>
+                      <a:srgbClr val="570C17"/>
                     </a:solidFill>
                     <a:lnL w="6350" cap="flat" cmpd="sng" algn="ctr">
                       <a:solidFill>
@@ -26498,7 +26376,7 @@
 </p:sld>
 </file>
 
-<file path=ppt/slides/slide3.xml><?xml version="1.0" encoding="utf-8"?>
+<file path=ppt/slides/slide2.xml><?xml version="1.0" encoding="utf-8"?>
 <p:sld xmlns:a="http://schemas.openxmlformats.org/drawingml/2006/main" xmlns:p="http://schemas.openxmlformats.org/presentationml/2006/main" xmlns:r="http://schemas.openxmlformats.org/officeDocument/2006/relationships">
   <p:cSld>
     <p:spTree>
@@ -26624,7 +26502,7 @@
                       <a:r>
                         <a:rPr sz="700" b="1">
                           <a:solidFill>
-                            <a:srgbClr val="641E28"/>
+                            <a:srgbClr val="FFFFFF"/>
                           </a:solidFill>
                           <a:latin typeface="Calibri"/>
                         </a:rPr>
@@ -26634,7 +26512,7 @@
                   </a:txBody>
                   <a:tcPr anchor="ctr" marL="25400" marR="25400" marT="12700" marB="12700">
                     <a:solidFill>
-                      <a:srgbClr val="F5B4BC"/>
+                      <a:srgbClr val="570C17"/>
                     </a:solidFill>
                     <a:lnL w="6350" cap="flat" cmpd="sng" algn="ctr">
                       <a:solidFill>
@@ -26677,7 +26555,7 @@
                       <a:r>
                         <a:rPr sz="700" b="1">
                           <a:solidFill>
-                            <a:srgbClr val="641E28"/>
+                            <a:srgbClr val="FFFFFF"/>
                           </a:solidFill>
                           <a:latin typeface="Calibri"/>
                         </a:rPr>
@@ -26687,7 +26565,7 @@
                   </a:txBody>
                   <a:tcPr anchor="ctr" marL="25400" marR="25400" marT="12700" marB="12700">
                     <a:solidFill>
-                      <a:srgbClr val="F5B4BC"/>
+                      <a:srgbClr val="570C17"/>
                     </a:solidFill>
                     <a:lnL w="6350" cap="flat" cmpd="sng" algn="ctr">
                       <a:solidFill>
@@ -26730,7 +26608,7 @@
                       <a:r>
                         <a:rPr sz="700" b="1">
                           <a:solidFill>
-                            <a:srgbClr val="641E28"/>
+                            <a:srgbClr val="FFFFFF"/>
                           </a:solidFill>
                           <a:latin typeface="Calibri"/>
                         </a:rPr>
@@ -26740,7 +26618,7 @@
                   </a:txBody>
                   <a:tcPr anchor="ctr" marL="25400" marR="25400" marT="12700" marB="12700">
                     <a:solidFill>
-                      <a:srgbClr val="FCDCE0"/>
+                      <a:srgbClr val="570C17"/>
                     </a:solidFill>
                     <a:lnL w="6350" cap="flat" cmpd="sng" algn="ctr">
                       <a:solidFill>
@@ -26928,7 +26806,7 @@
                       <a:r>
                         <a:rPr sz="700" b="1">
                           <a:solidFill>
-                            <a:srgbClr val="641E28"/>
+                            <a:srgbClr val="FFFFFF"/>
                           </a:solidFill>
                           <a:latin typeface="Calibri"/>
                         </a:rPr>
@@ -26938,7 +26816,7 @@
                   </a:txBody>
                   <a:tcPr anchor="ctr" marL="25400" marR="25400" marT="12700" marB="12700">
                     <a:solidFill>
-                      <a:srgbClr val="FCDCE0"/>
+                      <a:srgbClr val="570C17"/>
                     </a:solidFill>
                     <a:lnL w="6350" cap="flat" cmpd="sng" algn="ctr">
                       <a:solidFill>
@@ -27039,7 +26917,7 @@
                       <a:r>
                         <a:rPr sz="700" b="1">
                           <a:solidFill>
-                            <a:srgbClr val="641E28"/>
+                            <a:srgbClr val="FFFFFF"/>
                           </a:solidFill>
                           <a:latin typeface="Calibri"/>
                         </a:rPr>
@@ -27049,7 +26927,7 @@
                   </a:txBody>
                   <a:tcPr anchor="ctr" marL="25400" marR="25400" marT="12700" marB="12700">
                     <a:solidFill>
-                      <a:srgbClr val="FCDCE0"/>
+                      <a:srgbClr val="570C17"/>
                     </a:solidFill>
                     <a:lnL w="6350" cap="flat" cmpd="sng" algn="ctr">
                       <a:solidFill>
@@ -27092,7 +26970,7 @@
                       <a:r>
                         <a:rPr sz="700" b="1">
                           <a:solidFill>
-                            <a:srgbClr val="641E28"/>
+                            <a:srgbClr val="FFFFFF"/>
                           </a:solidFill>
                           <a:latin typeface="Calibri"/>
                         </a:rPr>
@@ -27102,7 +26980,7 @@
                   </a:txBody>
                   <a:tcPr anchor="ctr" marL="25400" marR="25400" marT="12700" marB="12700">
                     <a:solidFill>
-                      <a:srgbClr val="FCDCE0"/>
+                      <a:srgbClr val="570C17"/>
                     </a:solidFill>
                     <a:lnL w="6350" cap="flat" cmpd="sng" algn="ctr">
                       <a:solidFill>
@@ -27321,7 +27199,7 @@
                       <a:r>
                         <a:rPr sz="600" b="1">
                           <a:solidFill>
-                            <a:srgbClr val="641E28"/>
+                            <a:srgbClr val="FFFFFF"/>
                           </a:solidFill>
                           <a:latin typeface="Calibri"/>
                         </a:rPr>
@@ -27331,7 +27209,7 @@
                   </a:txBody>
                   <a:tcPr anchor="ctr" marL="25400" marR="25400" marT="12700" marB="12700">
                     <a:solidFill>
-                      <a:srgbClr val="F5B4BC"/>
+                      <a:srgbClr val="570C17"/>
                     </a:solidFill>
                     <a:lnL w="6350" cap="flat" cmpd="sng" algn="ctr">
                       <a:solidFill>
@@ -27374,7 +27252,7 @@
                       <a:r>
                         <a:rPr sz="600" b="1">
                           <a:solidFill>
-                            <a:srgbClr val="641E28"/>
+                            <a:srgbClr val="FFFFFF"/>
                           </a:solidFill>
                           <a:latin typeface="Calibri"/>
                         </a:rPr>
@@ -27384,7 +27262,7 @@
                   </a:txBody>
                   <a:tcPr anchor="ctr" marL="25400" marR="25400" marT="12700" marB="12700">
                     <a:solidFill>
-                      <a:srgbClr val="F5B4BC"/>
+                      <a:srgbClr val="570C17"/>
                     </a:solidFill>
                     <a:lnL w="6350" cap="flat" cmpd="sng" algn="ctr">
                       <a:solidFill>
@@ -27427,7 +27305,7 @@
                       <a:r>
                         <a:rPr sz="600" b="1">
                           <a:solidFill>
-                            <a:srgbClr val="641E28"/>
+                            <a:srgbClr val="FFFFFF"/>
                           </a:solidFill>
                           <a:latin typeface="Calibri"/>
                         </a:rPr>
@@ -27437,7 +27315,7 @@
                   </a:txBody>
                   <a:tcPr anchor="ctr" marL="25400" marR="25400" marT="12700" marB="12700">
                     <a:solidFill>
-                      <a:srgbClr val="F5B4BC"/>
+                      <a:srgbClr val="570C17"/>
                     </a:solidFill>
                     <a:lnL w="6350" cap="flat" cmpd="sng" algn="ctr">
                       <a:solidFill>
@@ -27480,7 +27358,7 @@
                       <a:r>
                         <a:rPr sz="600" b="1">
                           <a:solidFill>
-                            <a:srgbClr val="641E28"/>
+                            <a:srgbClr val="FFFFFF"/>
                           </a:solidFill>
                           <a:latin typeface="Calibri"/>
                         </a:rPr>
@@ -27490,7 +27368,7 @@
                   </a:txBody>
                   <a:tcPr anchor="ctr" marL="25400" marR="25400" marT="12700" marB="12700">
                     <a:solidFill>
-                      <a:srgbClr val="F5B4BC"/>
+                      <a:srgbClr val="570C17"/>
                     </a:solidFill>
                     <a:lnL w="6350" cap="flat" cmpd="sng" algn="ctr">
                       <a:solidFill>
@@ -27533,7 +27411,7 @@
                       <a:r>
                         <a:rPr sz="600" b="1">
                           <a:solidFill>
-                            <a:srgbClr val="641E28"/>
+                            <a:srgbClr val="FFFFFF"/>
                           </a:solidFill>
                           <a:latin typeface="Calibri"/>
                         </a:rPr>
@@ -27543,7 +27421,7 @@
                   </a:txBody>
                   <a:tcPr anchor="ctr" marL="25400" marR="25400" marT="12700" marB="12700">
                     <a:solidFill>
-                      <a:srgbClr val="F5B4BC"/>
+                      <a:srgbClr val="570C17"/>
                     </a:solidFill>
                     <a:lnL w="6350" cap="flat" cmpd="sng" algn="ctr">
                       <a:solidFill>
@@ -27586,7 +27464,7 @@
                       <a:r>
                         <a:rPr sz="600" b="1">
                           <a:solidFill>
-                            <a:srgbClr val="641E28"/>
+                            <a:srgbClr val="FFFFFF"/>
                           </a:solidFill>
                           <a:latin typeface="Calibri"/>
                         </a:rPr>
@@ -27596,7 +27474,7 @@
                   </a:txBody>
                   <a:tcPr anchor="ctr" marL="25400" marR="25400" marT="12700" marB="12700">
                     <a:solidFill>
-                      <a:srgbClr val="F5B4BC"/>
+                      <a:srgbClr val="570C17"/>
                     </a:solidFill>
                     <a:lnL w="6350" cap="flat" cmpd="sng" algn="ctr">
                       <a:solidFill>
@@ -27639,7 +27517,7 @@
                       <a:r>
                         <a:rPr sz="600" b="1">
                           <a:solidFill>
-                            <a:srgbClr val="641E28"/>
+                            <a:srgbClr val="FFFFFF"/>
                           </a:solidFill>
                           <a:latin typeface="Calibri"/>
                         </a:rPr>
@@ -27649,7 +27527,7 @@
                   </a:txBody>
                   <a:tcPr anchor="ctr" marL="25400" marR="25400" marT="12700" marB="12700">
                     <a:solidFill>
-                      <a:srgbClr val="F5B4BC"/>
+                      <a:srgbClr val="570C17"/>
                     </a:solidFill>
                     <a:lnL w="6350" cap="flat" cmpd="sng" algn="ctr">
                       <a:solidFill>
@@ -27692,7 +27570,7 @@
                       <a:r>
                         <a:rPr sz="600" b="1">
                           <a:solidFill>
-                            <a:srgbClr val="641E28"/>
+                            <a:srgbClr val="FFFFFF"/>
                           </a:solidFill>
                           <a:latin typeface="Calibri"/>
                         </a:rPr>
@@ -27702,7 +27580,7 @@
                   </a:txBody>
                   <a:tcPr anchor="ctr" marL="25400" marR="25400" marT="12700" marB="12700">
                     <a:solidFill>
-                      <a:srgbClr val="F5B4BC"/>
+                      <a:srgbClr val="570C17"/>
                     </a:solidFill>
                     <a:lnL w="6350" cap="flat" cmpd="sng" algn="ctr">
                       <a:solidFill>
@@ -27745,7 +27623,7 @@
                       <a:r>
                         <a:rPr sz="600" b="1">
                           <a:solidFill>
-                            <a:srgbClr val="641E28"/>
+                            <a:srgbClr val="FFFFFF"/>
                           </a:solidFill>
                           <a:latin typeface="Calibri"/>
                         </a:rPr>
@@ -27755,7 +27633,7 @@
                   </a:txBody>
                   <a:tcPr anchor="ctr" marL="25400" marR="25400" marT="12700" marB="12700">
                     <a:solidFill>
-                      <a:srgbClr val="F5B4BC"/>
+                      <a:srgbClr val="570C17"/>
                     </a:solidFill>
                     <a:lnL w="6350" cap="flat" cmpd="sng" algn="ctr">
                       <a:solidFill>
@@ -27798,7 +27676,7 @@
                       <a:r>
                         <a:rPr sz="600" b="1">
                           <a:solidFill>
-                            <a:srgbClr val="641E28"/>
+                            <a:srgbClr val="FFFFFF"/>
                           </a:solidFill>
                           <a:latin typeface="Calibri"/>
                         </a:rPr>
@@ -27808,7 +27686,7 @@
                   </a:txBody>
                   <a:tcPr anchor="ctr" marL="25400" marR="25400" marT="12700" marB="12700">
                     <a:solidFill>
-                      <a:srgbClr val="F5B4BC"/>
+                      <a:srgbClr val="570C17"/>
                     </a:solidFill>
                     <a:lnL w="6350" cap="flat" cmpd="sng" algn="ctr">
                       <a:solidFill>
@@ -27851,7 +27729,7 @@
                       <a:r>
                         <a:rPr sz="600" b="1">
                           <a:solidFill>
-                            <a:srgbClr val="641E28"/>
+                            <a:srgbClr val="FFFFFF"/>
                           </a:solidFill>
                           <a:latin typeface="Calibri"/>
                         </a:rPr>
@@ -27861,7 +27739,7 @@
                   </a:txBody>
                   <a:tcPr anchor="ctr" marL="25400" marR="25400" marT="12700" marB="12700">
                     <a:solidFill>
-                      <a:srgbClr val="F5B4BC"/>
+                      <a:srgbClr val="570C17"/>
                     </a:solidFill>
                     <a:lnL w="6350" cap="flat" cmpd="sng" algn="ctr">
                       <a:solidFill>
@@ -27904,7 +27782,7 @@
                       <a:r>
                         <a:rPr sz="600" b="1">
                           <a:solidFill>
-                            <a:srgbClr val="641E28"/>
+                            <a:srgbClr val="FFFFFF"/>
                           </a:solidFill>
                           <a:latin typeface="Calibri"/>
                         </a:rPr>
@@ -27914,7 +27792,7 @@
                   </a:txBody>
                   <a:tcPr anchor="ctr" marL="25400" marR="25400" marT="12700" marB="12700">
                     <a:solidFill>
-                      <a:srgbClr val="F5B4BC"/>
+                      <a:srgbClr val="570C17"/>
                     </a:solidFill>
                     <a:lnL w="6350" cap="flat" cmpd="sng" algn="ctr">
                       <a:solidFill>
@@ -27957,7 +27835,7 @@
                       <a:r>
                         <a:rPr sz="600" b="1">
                           <a:solidFill>
-                            <a:srgbClr val="641E28"/>
+                            <a:srgbClr val="FFFFFF"/>
                           </a:solidFill>
                           <a:latin typeface="Calibri"/>
                         </a:rPr>
@@ -27967,7 +27845,7 @@
                   </a:txBody>
                   <a:tcPr anchor="ctr" marL="25400" marR="25400" marT="12700" marB="12700">
                     <a:solidFill>
-                      <a:srgbClr val="F5B4BC"/>
+                      <a:srgbClr val="570C17"/>
                     </a:solidFill>
                     <a:lnL w="6350" cap="flat" cmpd="sng" algn="ctr">
                       <a:solidFill>
@@ -28010,7 +27888,7 @@
                       <a:r>
                         <a:rPr sz="600" b="1">
                           <a:solidFill>
-                            <a:srgbClr val="641E28"/>
+                            <a:srgbClr val="FFFFFF"/>
                           </a:solidFill>
                           <a:latin typeface="Calibri"/>
                         </a:rPr>
@@ -28020,7 +27898,7 @@
                   </a:txBody>
                   <a:tcPr anchor="ctr" marL="25400" marR="25400" marT="12700" marB="12700">
                     <a:solidFill>
-                      <a:srgbClr val="F5B4BC"/>
+                      <a:srgbClr val="570C17"/>
                     </a:solidFill>
                     <a:lnL w="6350" cap="flat" cmpd="sng" algn="ctr">
                       <a:solidFill>
@@ -28063,7 +27941,7 @@
                       <a:r>
                         <a:rPr sz="600" b="1">
                           <a:solidFill>
-                            <a:srgbClr val="641E28"/>
+                            <a:srgbClr val="FFFFFF"/>
                           </a:solidFill>
                           <a:latin typeface="Calibri"/>
                         </a:rPr>
@@ -28073,7 +27951,7 @@
                   </a:txBody>
                   <a:tcPr anchor="ctr" marL="25400" marR="25400" marT="12700" marB="12700">
                     <a:solidFill>
-                      <a:srgbClr val="F5B4BC"/>
+                      <a:srgbClr val="570C17"/>
                     </a:solidFill>
                     <a:lnL w="6350" cap="flat" cmpd="sng" algn="ctr">
                       <a:solidFill>

--- a/График_запуска_RTR.pptx
+++ b/График_запуска_RTR.pptx
@@ -3490,7 +3490,7 @@
                     </a:lnB>
                   </a:tcPr>
                 </a:tc>
-                <a:tc gridSpan="3">
+                <a:tc gridSpan="8">
                   <a:txBody>
                     <a:bodyPr wrap="square"/>
                     <a:lstStyle/>
@@ -3601,6 +3601,151 @@
                     </a:lnB>
                   </a:tcPr>
                 </a:tc>
+                <a:tc hMerge="1">
+                  <a:txBody>
+                    <a:bodyPr/>
+                    <a:lstStyle/>
+                    <a:p/>
+                  </a:txBody>
+                  <a:tcPr>
+                    <a:lnL w="6350" cap="flat" cmpd="sng" algn="ctr">
+                      <a:solidFill>
+                        <a:srgbClr val="E8C4C8"/>
+                      </a:solidFill>
+                    </a:lnL>
+                    <a:lnR w="6350" cap="flat" cmpd="sng" algn="ctr">
+                      <a:solidFill>
+                        <a:srgbClr val="E8C4C8"/>
+                      </a:solidFill>
+                    </a:lnR>
+                    <a:lnT w="6350" cap="flat" cmpd="sng" algn="ctr">
+                      <a:solidFill>
+                        <a:srgbClr val="E8C4C8"/>
+                      </a:solidFill>
+                    </a:lnT>
+                    <a:lnB w="6350" cap="flat" cmpd="sng" algn="ctr">
+                      <a:solidFill>
+                        <a:srgbClr val="E8C4C8"/>
+                      </a:solidFill>
+                    </a:lnB>
+                  </a:tcPr>
+                </a:tc>
+                <a:tc hMerge="1">
+                  <a:txBody>
+                    <a:bodyPr/>
+                    <a:lstStyle/>
+                    <a:p/>
+                  </a:txBody>
+                  <a:tcPr>
+                    <a:lnL w="6350" cap="flat" cmpd="sng" algn="ctr">
+                      <a:solidFill>
+                        <a:srgbClr val="E8C4C8"/>
+                      </a:solidFill>
+                    </a:lnL>
+                    <a:lnR w="6350" cap="flat" cmpd="sng" algn="ctr">
+                      <a:solidFill>
+                        <a:srgbClr val="E8C4C8"/>
+                      </a:solidFill>
+                    </a:lnR>
+                    <a:lnT w="6350" cap="flat" cmpd="sng" algn="ctr">
+                      <a:solidFill>
+                        <a:srgbClr val="E8C4C8"/>
+                      </a:solidFill>
+                    </a:lnT>
+                    <a:lnB w="6350" cap="flat" cmpd="sng" algn="ctr">
+                      <a:solidFill>
+                        <a:srgbClr val="E8C4C8"/>
+                      </a:solidFill>
+                    </a:lnB>
+                  </a:tcPr>
+                </a:tc>
+                <a:tc hMerge="1">
+                  <a:txBody>
+                    <a:bodyPr/>
+                    <a:lstStyle/>
+                    <a:p/>
+                  </a:txBody>
+                  <a:tcPr>
+                    <a:lnL w="6350" cap="flat" cmpd="sng" algn="ctr">
+                      <a:solidFill>
+                        <a:srgbClr val="E8C4C8"/>
+                      </a:solidFill>
+                    </a:lnL>
+                    <a:lnR w="6350" cap="flat" cmpd="sng" algn="ctr">
+                      <a:solidFill>
+                        <a:srgbClr val="E8C4C8"/>
+                      </a:solidFill>
+                    </a:lnR>
+                    <a:lnT w="6350" cap="flat" cmpd="sng" algn="ctr">
+                      <a:solidFill>
+                        <a:srgbClr val="E8C4C8"/>
+                      </a:solidFill>
+                    </a:lnT>
+                    <a:lnB w="6350" cap="flat" cmpd="sng" algn="ctr">
+                      <a:solidFill>
+                        <a:srgbClr val="E8C4C8"/>
+                      </a:solidFill>
+                    </a:lnB>
+                  </a:tcPr>
+                </a:tc>
+                <a:tc hMerge="1">
+                  <a:txBody>
+                    <a:bodyPr/>
+                    <a:lstStyle/>
+                    <a:p/>
+                  </a:txBody>
+                  <a:tcPr>
+                    <a:lnL w="6350" cap="flat" cmpd="sng" algn="ctr">
+                      <a:solidFill>
+                        <a:srgbClr val="E8C4C8"/>
+                      </a:solidFill>
+                    </a:lnL>
+                    <a:lnR w="6350" cap="flat" cmpd="sng" algn="ctr">
+                      <a:solidFill>
+                        <a:srgbClr val="E8C4C8"/>
+                      </a:solidFill>
+                    </a:lnR>
+                    <a:lnT w="6350" cap="flat" cmpd="sng" algn="ctr">
+                      <a:solidFill>
+                        <a:srgbClr val="E8C4C8"/>
+                      </a:solidFill>
+                    </a:lnT>
+                    <a:lnB w="6350" cap="flat" cmpd="sng" algn="ctr">
+                      <a:solidFill>
+                        <a:srgbClr val="E8C4C8"/>
+                      </a:solidFill>
+                    </a:lnB>
+                  </a:tcPr>
+                </a:tc>
+                <a:tc hMerge="1">
+                  <a:txBody>
+                    <a:bodyPr/>
+                    <a:lstStyle/>
+                    <a:p/>
+                  </a:txBody>
+                  <a:tcPr>
+                    <a:lnL w="6350" cap="flat" cmpd="sng" algn="ctr">
+                      <a:solidFill>
+                        <a:srgbClr val="E8C4C8"/>
+                      </a:solidFill>
+                    </a:lnL>
+                    <a:lnR w="6350" cap="flat" cmpd="sng" algn="ctr">
+                      <a:solidFill>
+                        <a:srgbClr val="E8C4C8"/>
+                      </a:solidFill>
+                    </a:lnR>
+                    <a:lnT w="6350" cap="flat" cmpd="sng" algn="ctr">
+                      <a:solidFill>
+                        <a:srgbClr val="E8C4C8"/>
+                      </a:solidFill>
+                    </a:lnT>
+                    <a:lnB w="6350" cap="flat" cmpd="sng" algn="ctr">
+                      <a:solidFill>
+                        <a:srgbClr val="E8C4C8"/>
+                      </a:solidFill>
+                    </a:lnB>
+                  </a:tcPr>
+                </a:tc>
                 <a:tc>
                   <a:txBody>
                     <a:bodyPr wrap="square"/>
@@ -3632,175 +3777,6 @@
                     <a:solidFill>
                       <a:srgbClr val="570C17"/>
                     </a:solidFill>
-                    <a:lnL w="6350" cap="flat" cmpd="sng" algn="ctr">
-                      <a:solidFill>
-                        <a:srgbClr val="E8C4C8"/>
-                      </a:solidFill>
-                    </a:lnL>
-                    <a:lnR w="6350" cap="flat" cmpd="sng" algn="ctr">
-                      <a:solidFill>
-                        <a:srgbClr val="E8C4C8"/>
-                      </a:solidFill>
-                    </a:lnR>
-                    <a:lnT w="6350" cap="flat" cmpd="sng" algn="ctr">
-                      <a:solidFill>
-                        <a:srgbClr val="E8C4C8"/>
-                      </a:solidFill>
-                    </a:lnT>
-                    <a:lnB w="6350" cap="flat" cmpd="sng" algn="ctr">
-                      <a:solidFill>
-                        <a:srgbClr val="E8C4C8"/>
-                      </a:solidFill>
-                    </a:lnB>
-                  </a:tcPr>
-                </a:tc>
-                <a:tc gridSpan="5">
-                  <a:txBody>
-                    <a:bodyPr wrap="square"/>
-                    <a:lstStyle/>
-                    <a:p>
-                      <a:pPr algn="ctr">
-                        <a:lnSpc>
-                          <a:spcPct val="100000"/>
-                        </a:lnSpc>
-                        <a:spcBef>
-                          <a:spcPts val="0"/>
-                        </a:spcBef>
-                        <a:spcAft>
-                          <a:spcPts val="0"/>
-                        </a:spcAft>
-                      </a:pPr>
-                      <a:r>
-                        <a:rPr sz="700" b="1">
-                          <a:solidFill>
-                            <a:srgbClr val="FFFFFF"/>
-                          </a:solidFill>
-                          <a:latin typeface="Calibri"/>
-                        </a:rPr>
-                        <a:t>2027</a:t>
-                      </a:r>
-                    </a:p>
-                  </a:txBody>
-                  <a:tcPr anchor="ctr" marL="25400" marR="25400" marT="12700" marB="12700">
-                    <a:solidFill>
-                      <a:srgbClr val="570C17"/>
-                    </a:solidFill>
-                    <a:lnL w="6350" cap="flat" cmpd="sng" algn="ctr">
-                      <a:solidFill>
-                        <a:srgbClr val="E8C4C8"/>
-                      </a:solidFill>
-                    </a:lnL>
-                    <a:lnR w="6350" cap="flat" cmpd="sng" algn="ctr">
-                      <a:solidFill>
-                        <a:srgbClr val="E8C4C8"/>
-                      </a:solidFill>
-                    </a:lnR>
-                    <a:lnT w="6350" cap="flat" cmpd="sng" algn="ctr">
-                      <a:solidFill>
-                        <a:srgbClr val="E8C4C8"/>
-                      </a:solidFill>
-                    </a:lnT>
-                    <a:lnB w="6350" cap="flat" cmpd="sng" algn="ctr">
-                      <a:solidFill>
-                        <a:srgbClr val="E8C4C8"/>
-                      </a:solidFill>
-                    </a:lnB>
-                  </a:tcPr>
-                </a:tc>
-                <a:tc hMerge="1">
-                  <a:txBody>
-                    <a:bodyPr/>
-                    <a:lstStyle/>
-                    <a:p/>
-                  </a:txBody>
-                  <a:tcPr>
-                    <a:lnL w="6350" cap="flat" cmpd="sng" algn="ctr">
-                      <a:solidFill>
-                        <a:srgbClr val="E8C4C8"/>
-                      </a:solidFill>
-                    </a:lnL>
-                    <a:lnR w="6350" cap="flat" cmpd="sng" algn="ctr">
-                      <a:solidFill>
-                        <a:srgbClr val="E8C4C8"/>
-                      </a:solidFill>
-                    </a:lnR>
-                    <a:lnT w="6350" cap="flat" cmpd="sng" algn="ctr">
-                      <a:solidFill>
-                        <a:srgbClr val="E8C4C8"/>
-                      </a:solidFill>
-                    </a:lnT>
-                    <a:lnB w="6350" cap="flat" cmpd="sng" algn="ctr">
-                      <a:solidFill>
-                        <a:srgbClr val="E8C4C8"/>
-                      </a:solidFill>
-                    </a:lnB>
-                  </a:tcPr>
-                </a:tc>
-                <a:tc hMerge="1">
-                  <a:txBody>
-                    <a:bodyPr/>
-                    <a:lstStyle/>
-                    <a:p/>
-                  </a:txBody>
-                  <a:tcPr>
-                    <a:lnL w="6350" cap="flat" cmpd="sng" algn="ctr">
-                      <a:solidFill>
-                        <a:srgbClr val="E8C4C8"/>
-                      </a:solidFill>
-                    </a:lnL>
-                    <a:lnR w="6350" cap="flat" cmpd="sng" algn="ctr">
-                      <a:solidFill>
-                        <a:srgbClr val="E8C4C8"/>
-                      </a:solidFill>
-                    </a:lnR>
-                    <a:lnT w="6350" cap="flat" cmpd="sng" algn="ctr">
-                      <a:solidFill>
-                        <a:srgbClr val="E8C4C8"/>
-                      </a:solidFill>
-                    </a:lnT>
-                    <a:lnB w="6350" cap="flat" cmpd="sng" algn="ctr">
-                      <a:solidFill>
-                        <a:srgbClr val="E8C4C8"/>
-                      </a:solidFill>
-                    </a:lnB>
-                  </a:tcPr>
-                </a:tc>
-                <a:tc hMerge="1">
-                  <a:txBody>
-                    <a:bodyPr/>
-                    <a:lstStyle/>
-                    <a:p/>
-                  </a:txBody>
-                  <a:tcPr>
-                    <a:lnL w="6350" cap="flat" cmpd="sng" algn="ctr">
-                      <a:solidFill>
-                        <a:srgbClr val="E8C4C8"/>
-                      </a:solidFill>
-                    </a:lnL>
-                    <a:lnR w="6350" cap="flat" cmpd="sng" algn="ctr">
-                      <a:solidFill>
-                        <a:srgbClr val="E8C4C8"/>
-                      </a:solidFill>
-                    </a:lnR>
-                    <a:lnT w="6350" cap="flat" cmpd="sng" algn="ctr">
-                      <a:solidFill>
-                        <a:srgbClr val="E8C4C8"/>
-                      </a:solidFill>
-                    </a:lnT>
-                    <a:lnB w="6350" cap="flat" cmpd="sng" algn="ctr">
-                      <a:solidFill>
-                        <a:srgbClr val="E8C4C8"/>
-                      </a:solidFill>
-                    </a:lnB>
-                  </a:tcPr>
-                </a:tc>
-                <a:tc hMerge="1">
-                  <a:txBody>
-                    <a:bodyPr/>
-                    <a:lstStyle/>
-                    <a:p/>
-                  </a:txBody>
-                  <a:tcPr>
                     <a:lnL w="6350" cap="flat" cmpd="sng" algn="ctr">
                       <a:solidFill>
                         <a:srgbClr val="E8C4C8"/>
@@ -4383,272 +4359,272 @@
                           </a:solidFill>
                           <a:latin typeface="Calibri"/>
                         </a:rPr>
+                        <a:t>05.27</a:t>
+                      </a:r>
+                    </a:p>
+                  </a:txBody>
+                  <a:tcPr anchor="ctr" marL="25400" marR="25400" marT="12700" marB="12700">
+                    <a:solidFill>
+                      <a:srgbClr val="570C17"/>
+                    </a:solidFill>
+                    <a:lnL w="6350" cap="flat" cmpd="sng" algn="ctr">
+                      <a:solidFill>
+                        <a:srgbClr val="E8C4C8"/>
+                      </a:solidFill>
+                    </a:lnL>
+                    <a:lnR w="6350" cap="flat" cmpd="sng" algn="ctr">
+                      <a:solidFill>
+                        <a:srgbClr val="E8C4C8"/>
+                      </a:solidFill>
+                    </a:lnR>
+                    <a:lnT w="6350" cap="flat" cmpd="sng" algn="ctr">
+                      <a:solidFill>
+                        <a:srgbClr val="E8C4C8"/>
+                      </a:solidFill>
+                    </a:lnT>
+                    <a:lnB w="6350" cap="flat" cmpd="sng" algn="ctr">
+                      <a:solidFill>
+                        <a:srgbClr val="E8C4C8"/>
+                      </a:solidFill>
+                    </a:lnB>
+                  </a:tcPr>
+                </a:tc>
+                <a:tc>
+                  <a:txBody>
+                    <a:bodyPr wrap="square"/>
+                    <a:lstStyle/>
+                    <a:p>
+                      <a:pPr algn="ctr">
+                        <a:lnSpc>
+                          <a:spcPct val="100000"/>
+                        </a:lnSpc>
+                        <a:spcBef>
+                          <a:spcPts val="0"/>
+                        </a:spcBef>
+                        <a:spcAft>
+                          <a:spcPts val="0"/>
+                        </a:spcAft>
+                      </a:pPr>
+                      <a:r>
+                        <a:rPr sz="600" b="1">
+                          <a:solidFill>
+                            <a:srgbClr val="FFFFFF"/>
+                          </a:solidFill>
+                          <a:latin typeface="Calibri"/>
+                        </a:rPr>
+                        <a:t>06.27</a:t>
+                      </a:r>
+                    </a:p>
+                  </a:txBody>
+                  <a:tcPr anchor="ctr" marL="25400" marR="25400" marT="12700" marB="12700">
+                    <a:solidFill>
+                      <a:srgbClr val="570C17"/>
+                    </a:solidFill>
+                    <a:lnL w="6350" cap="flat" cmpd="sng" algn="ctr">
+                      <a:solidFill>
+                        <a:srgbClr val="E8C4C8"/>
+                      </a:solidFill>
+                    </a:lnL>
+                    <a:lnR w="6350" cap="flat" cmpd="sng" algn="ctr">
+                      <a:solidFill>
+                        <a:srgbClr val="E8C4C8"/>
+                      </a:solidFill>
+                    </a:lnR>
+                    <a:lnT w="6350" cap="flat" cmpd="sng" algn="ctr">
+                      <a:solidFill>
+                        <a:srgbClr val="E8C4C8"/>
+                      </a:solidFill>
+                    </a:lnT>
+                    <a:lnB w="6350" cap="flat" cmpd="sng" algn="ctr">
+                      <a:solidFill>
+                        <a:srgbClr val="E8C4C8"/>
+                      </a:solidFill>
+                    </a:lnB>
+                  </a:tcPr>
+                </a:tc>
+                <a:tc>
+                  <a:txBody>
+                    <a:bodyPr wrap="square"/>
+                    <a:lstStyle/>
+                    <a:p>
+                      <a:pPr algn="ctr">
+                        <a:lnSpc>
+                          <a:spcPct val="100000"/>
+                        </a:lnSpc>
+                        <a:spcBef>
+                          <a:spcPts val="0"/>
+                        </a:spcBef>
+                        <a:spcAft>
+                          <a:spcPts val="0"/>
+                        </a:spcAft>
+                      </a:pPr>
+                      <a:r>
+                        <a:rPr sz="600" b="1">
+                          <a:solidFill>
+                            <a:srgbClr val="FFFFFF"/>
+                          </a:solidFill>
+                          <a:latin typeface="Calibri"/>
+                        </a:rPr>
+                        <a:t>07.27</a:t>
+                      </a:r>
+                    </a:p>
+                  </a:txBody>
+                  <a:tcPr anchor="ctr" marL="25400" marR="25400" marT="12700" marB="12700">
+                    <a:solidFill>
+                      <a:srgbClr val="570C17"/>
+                    </a:solidFill>
+                    <a:lnL w="6350" cap="flat" cmpd="sng" algn="ctr">
+                      <a:solidFill>
+                        <a:srgbClr val="E8C4C8"/>
+                      </a:solidFill>
+                    </a:lnL>
+                    <a:lnR w="6350" cap="flat" cmpd="sng" algn="ctr">
+                      <a:solidFill>
+                        <a:srgbClr val="E8C4C8"/>
+                      </a:solidFill>
+                    </a:lnR>
+                    <a:lnT w="6350" cap="flat" cmpd="sng" algn="ctr">
+                      <a:solidFill>
+                        <a:srgbClr val="E8C4C8"/>
+                      </a:solidFill>
+                    </a:lnT>
+                    <a:lnB w="6350" cap="flat" cmpd="sng" algn="ctr">
+                      <a:solidFill>
+                        <a:srgbClr val="E8C4C8"/>
+                      </a:solidFill>
+                    </a:lnB>
+                  </a:tcPr>
+                </a:tc>
+                <a:tc>
+                  <a:txBody>
+                    <a:bodyPr wrap="square"/>
+                    <a:lstStyle/>
+                    <a:p>
+                      <a:pPr algn="ctr">
+                        <a:lnSpc>
+                          <a:spcPct val="100000"/>
+                        </a:lnSpc>
+                        <a:spcBef>
+                          <a:spcPts val="0"/>
+                        </a:spcBef>
+                        <a:spcAft>
+                          <a:spcPts val="0"/>
+                        </a:spcAft>
+                      </a:pPr>
+                      <a:r>
+                        <a:rPr sz="600" b="1">
+                          <a:solidFill>
+                            <a:srgbClr val="FFFFFF"/>
+                          </a:solidFill>
+                          <a:latin typeface="Calibri"/>
+                        </a:rPr>
+                        <a:t>08.27</a:t>
+                      </a:r>
+                    </a:p>
+                  </a:txBody>
+                  <a:tcPr anchor="ctr" marL="25400" marR="25400" marT="12700" marB="12700">
+                    <a:solidFill>
+                      <a:srgbClr val="570C17"/>
+                    </a:solidFill>
+                    <a:lnL w="6350" cap="flat" cmpd="sng" algn="ctr">
+                      <a:solidFill>
+                        <a:srgbClr val="E8C4C8"/>
+                      </a:solidFill>
+                    </a:lnL>
+                    <a:lnR w="6350" cap="flat" cmpd="sng" algn="ctr">
+                      <a:solidFill>
+                        <a:srgbClr val="E8C4C8"/>
+                      </a:solidFill>
+                    </a:lnR>
+                    <a:lnT w="6350" cap="flat" cmpd="sng" algn="ctr">
+                      <a:solidFill>
+                        <a:srgbClr val="E8C4C8"/>
+                      </a:solidFill>
+                    </a:lnT>
+                    <a:lnB w="6350" cap="flat" cmpd="sng" algn="ctr">
+                      <a:solidFill>
+                        <a:srgbClr val="E8C4C8"/>
+                      </a:solidFill>
+                    </a:lnB>
+                  </a:tcPr>
+                </a:tc>
+                <a:tc>
+                  <a:txBody>
+                    <a:bodyPr wrap="square"/>
+                    <a:lstStyle/>
+                    <a:p>
+                      <a:pPr algn="ctr">
+                        <a:lnSpc>
+                          <a:spcPct val="100000"/>
+                        </a:lnSpc>
+                        <a:spcBef>
+                          <a:spcPts val="0"/>
+                        </a:spcBef>
+                        <a:spcAft>
+                          <a:spcPts val="0"/>
+                        </a:spcAft>
+                      </a:pPr>
+                      <a:r>
+                        <a:rPr sz="600" b="1">
+                          <a:solidFill>
+                            <a:srgbClr val="FFFFFF"/>
+                          </a:solidFill>
+                          <a:latin typeface="Calibri"/>
+                        </a:rPr>
+                        <a:t>09.27</a:t>
+                      </a:r>
+                    </a:p>
+                  </a:txBody>
+                  <a:tcPr anchor="ctr" marL="25400" marR="25400" marT="12700" marB="12700">
+                    <a:solidFill>
+                      <a:srgbClr val="570C17"/>
+                    </a:solidFill>
+                    <a:lnL w="6350" cap="flat" cmpd="sng" algn="ctr">
+                      <a:solidFill>
+                        <a:srgbClr val="E8C4C8"/>
+                      </a:solidFill>
+                    </a:lnL>
+                    <a:lnR w="6350" cap="flat" cmpd="sng" algn="ctr">
+                      <a:solidFill>
+                        <a:srgbClr val="E8C4C8"/>
+                      </a:solidFill>
+                    </a:lnR>
+                    <a:lnT w="6350" cap="flat" cmpd="sng" algn="ctr">
+                      <a:solidFill>
+                        <a:srgbClr val="E8C4C8"/>
+                      </a:solidFill>
+                    </a:lnT>
+                    <a:lnB w="6350" cap="flat" cmpd="sng" algn="ctr">
+                      <a:solidFill>
+                        <a:srgbClr val="E8C4C8"/>
+                      </a:solidFill>
+                    </a:lnB>
+                  </a:tcPr>
+                </a:tc>
+                <a:tc>
+                  <a:txBody>
+                    <a:bodyPr wrap="square"/>
+                    <a:lstStyle/>
+                    <a:p>
+                      <a:pPr algn="ctr">
+                        <a:lnSpc>
+                          <a:spcPct val="100000"/>
+                        </a:lnSpc>
+                        <a:spcBef>
+                          <a:spcPts val="0"/>
+                        </a:spcBef>
+                        <a:spcAft>
+                          <a:spcPts val="0"/>
+                        </a:spcAft>
+                      </a:pPr>
+                      <a:r>
+                        <a:rPr sz="600" b="1">
+                          <a:solidFill>
+                            <a:srgbClr val="FFFFFF"/>
+                          </a:solidFill>
+                          <a:latin typeface="Calibri"/>
+                        </a:rPr>
                         <a:t>04.28</a:t>
-                      </a:r>
-                    </a:p>
-                  </a:txBody>
-                  <a:tcPr anchor="ctr" marL="25400" marR="25400" marT="12700" marB="12700">
-                    <a:solidFill>
-                      <a:srgbClr val="570C17"/>
-                    </a:solidFill>
-                    <a:lnL w="6350" cap="flat" cmpd="sng" algn="ctr">
-                      <a:solidFill>
-                        <a:srgbClr val="E8C4C8"/>
-                      </a:solidFill>
-                    </a:lnL>
-                    <a:lnR w="6350" cap="flat" cmpd="sng" algn="ctr">
-                      <a:solidFill>
-                        <a:srgbClr val="E8C4C8"/>
-                      </a:solidFill>
-                    </a:lnR>
-                    <a:lnT w="6350" cap="flat" cmpd="sng" algn="ctr">
-                      <a:solidFill>
-                        <a:srgbClr val="E8C4C8"/>
-                      </a:solidFill>
-                    </a:lnT>
-                    <a:lnB w="6350" cap="flat" cmpd="sng" algn="ctr">
-                      <a:solidFill>
-                        <a:srgbClr val="E8C4C8"/>
-                      </a:solidFill>
-                    </a:lnB>
-                  </a:tcPr>
-                </a:tc>
-                <a:tc>
-                  <a:txBody>
-                    <a:bodyPr wrap="square"/>
-                    <a:lstStyle/>
-                    <a:p>
-                      <a:pPr algn="ctr">
-                        <a:lnSpc>
-                          <a:spcPct val="100000"/>
-                        </a:lnSpc>
-                        <a:spcBef>
-                          <a:spcPts val="0"/>
-                        </a:spcBef>
-                        <a:spcAft>
-                          <a:spcPts val="0"/>
-                        </a:spcAft>
-                      </a:pPr>
-                      <a:r>
-                        <a:rPr sz="600" b="1">
-                          <a:solidFill>
-                            <a:srgbClr val="FFFFFF"/>
-                          </a:solidFill>
-                          <a:latin typeface="Calibri"/>
-                        </a:rPr>
-                        <a:t>05.27</a:t>
-                      </a:r>
-                    </a:p>
-                  </a:txBody>
-                  <a:tcPr anchor="ctr" marL="25400" marR="25400" marT="12700" marB="12700">
-                    <a:solidFill>
-                      <a:srgbClr val="570C17"/>
-                    </a:solidFill>
-                    <a:lnL w="6350" cap="flat" cmpd="sng" algn="ctr">
-                      <a:solidFill>
-                        <a:srgbClr val="E8C4C8"/>
-                      </a:solidFill>
-                    </a:lnL>
-                    <a:lnR w="6350" cap="flat" cmpd="sng" algn="ctr">
-                      <a:solidFill>
-                        <a:srgbClr val="E8C4C8"/>
-                      </a:solidFill>
-                    </a:lnR>
-                    <a:lnT w="6350" cap="flat" cmpd="sng" algn="ctr">
-                      <a:solidFill>
-                        <a:srgbClr val="E8C4C8"/>
-                      </a:solidFill>
-                    </a:lnT>
-                    <a:lnB w="6350" cap="flat" cmpd="sng" algn="ctr">
-                      <a:solidFill>
-                        <a:srgbClr val="E8C4C8"/>
-                      </a:solidFill>
-                    </a:lnB>
-                  </a:tcPr>
-                </a:tc>
-                <a:tc>
-                  <a:txBody>
-                    <a:bodyPr wrap="square"/>
-                    <a:lstStyle/>
-                    <a:p>
-                      <a:pPr algn="ctr">
-                        <a:lnSpc>
-                          <a:spcPct val="100000"/>
-                        </a:lnSpc>
-                        <a:spcBef>
-                          <a:spcPts val="0"/>
-                        </a:spcBef>
-                        <a:spcAft>
-                          <a:spcPts val="0"/>
-                        </a:spcAft>
-                      </a:pPr>
-                      <a:r>
-                        <a:rPr sz="600" b="1">
-                          <a:solidFill>
-                            <a:srgbClr val="FFFFFF"/>
-                          </a:solidFill>
-                          <a:latin typeface="Calibri"/>
-                        </a:rPr>
-                        <a:t>06.27</a:t>
-                      </a:r>
-                    </a:p>
-                  </a:txBody>
-                  <a:tcPr anchor="ctr" marL="25400" marR="25400" marT="12700" marB="12700">
-                    <a:solidFill>
-                      <a:srgbClr val="570C17"/>
-                    </a:solidFill>
-                    <a:lnL w="6350" cap="flat" cmpd="sng" algn="ctr">
-                      <a:solidFill>
-                        <a:srgbClr val="E8C4C8"/>
-                      </a:solidFill>
-                    </a:lnL>
-                    <a:lnR w="6350" cap="flat" cmpd="sng" algn="ctr">
-                      <a:solidFill>
-                        <a:srgbClr val="E8C4C8"/>
-                      </a:solidFill>
-                    </a:lnR>
-                    <a:lnT w="6350" cap="flat" cmpd="sng" algn="ctr">
-                      <a:solidFill>
-                        <a:srgbClr val="E8C4C8"/>
-                      </a:solidFill>
-                    </a:lnT>
-                    <a:lnB w="6350" cap="flat" cmpd="sng" algn="ctr">
-                      <a:solidFill>
-                        <a:srgbClr val="E8C4C8"/>
-                      </a:solidFill>
-                    </a:lnB>
-                  </a:tcPr>
-                </a:tc>
-                <a:tc>
-                  <a:txBody>
-                    <a:bodyPr wrap="square"/>
-                    <a:lstStyle/>
-                    <a:p>
-                      <a:pPr algn="ctr">
-                        <a:lnSpc>
-                          <a:spcPct val="100000"/>
-                        </a:lnSpc>
-                        <a:spcBef>
-                          <a:spcPts val="0"/>
-                        </a:spcBef>
-                        <a:spcAft>
-                          <a:spcPts val="0"/>
-                        </a:spcAft>
-                      </a:pPr>
-                      <a:r>
-                        <a:rPr sz="600" b="1">
-                          <a:solidFill>
-                            <a:srgbClr val="FFFFFF"/>
-                          </a:solidFill>
-                          <a:latin typeface="Calibri"/>
-                        </a:rPr>
-                        <a:t>07.27</a:t>
-                      </a:r>
-                    </a:p>
-                  </a:txBody>
-                  <a:tcPr anchor="ctr" marL="25400" marR="25400" marT="12700" marB="12700">
-                    <a:solidFill>
-                      <a:srgbClr val="570C17"/>
-                    </a:solidFill>
-                    <a:lnL w="6350" cap="flat" cmpd="sng" algn="ctr">
-                      <a:solidFill>
-                        <a:srgbClr val="E8C4C8"/>
-                      </a:solidFill>
-                    </a:lnL>
-                    <a:lnR w="6350" cap="flat" cmpd="sng" algn="ctr">
-                      <a:solidFill>
-                        <a:srgbClr val="E8C4C8"/>
-                      </a:solidFill>
-                    </a:lnR>
-                    <a:lnT w="6350" cap="flat" cmpd="sng" algn="ctr">
-                      <a:solidFill>
-                        <a:srgbClr val="E8C4C8"/>
-                      </a:solidFill>
-                    </a:lnT>
-                    <a:lnB w="6350" cap="flat" cmpd="sng" algn="ctr">
-                      <a:solidFill>
-                        <a:srgbClr val="E8C4C8"/>
-                      </a:solidFill>
-                    </a:lnB>
-                  </a:tcPr>
-                </a:tc>
-                <a:tc>
-                  <a:txBody>
-                    <a:bodyPr wrap="square"/>
-                    <a:lstStyle/>
-                    <a:p>
-                      <a:pPr algn="ctr">
-                        <a:lnSpc>
-                          <a:spcPct val="100000"/>
-                        </a:lnSpc>
-                        <a:spcBef>
-                          <a:spcPts val="0"/>
-                        </a:spcBef>
-                        <a:spcAft>
-                          <a:spcPts val="0"/>
-                        </a:spcAft>
-                      </a:pPr>
-                      <a:r>
-                        <a:rPr sz="600" b="1">
-                          <a:solidFill>
-                            <a:srgbClr val="FFFFFF"/>
-                          </a:solidFill>
-                          <a:latin typeface="Calibri"/>
-                        </a:rPr>
-                        <a:t>08.27</a:t>
-                      </a:r>
-                    </a:p>
-                  </a:txBody>
-                  <a:tcPr anchor="ctr" marL="25400" marR="25400" marT="12700" marB="12700">
-                    <a:solidFill>
-                      <a:srgbClr val="570C17"/>
-                    </a:solidFill>
-                    <a:lnL w="6350" cap="flat" cmpd="sng" algn="ctr">
-                      <a:solidFill>
-                        <a:srgbClr val="E8C4C8"/>
-                      </a:solidFill>
-                    </a:lnL>
-                    <a:lnR w="6350" cap="flat" cmpd="sng" algn="ctr">
-                      <a:solidFill>
-                        <a:srgbClr val="E8C4C8"/>
-                      </a:solidFill>
-                    </a:lnR>
-                    <a:lnT w="6350" cap="flat" cmpd="sng" algn="ctr">
-                      <a:solidFill>
-                        <a:srgbClr val="E8C4C8"/>
-                      </a:solidFill>
-                    </a:lnT>
-                    <a:lnB w="6350" cap="flat" cmpd="sng" algn="ctr">
-                      <a:solidFill>
-                        <a:srgbClr val="E8C4C8"/>
-                      </a:solidFill>
-                    </a:lnB>
-                  </a:tcPr>
-                </a:tc>
-                <a:tc>
-                  <a:txBody>
-                    <a:bodyPr wrap="square"/>
-                    <a:lstStyle/>
-                    <a:p>
-                      <a:pPr algn="ctr">
-                        <a:lnSpc>
-                          <a:spcPct val="100000"/>
-                        </a:lnSpc>
-                        <a:spcBef>
-                          <a:spcPts val="0"/>
-                        </a:spcBef>
-                        <a:spcAft>
-                          <a:spcPts val="0"/>
-                        </a:spcAft>
-                      </a:pPr>
-                      <a:r>
-                        <a:rPr sz="600" b="1">
-                          <a:solidFill>
-                            <a:srgbClr val="FFFFFF"/>
-                          </a:solidFill>
-                          <a:latin typeface="Calibri"/>
-                        </a:rPr>
-                        <a:t>09.27</a:t>
                       </a:r>
                     </a:p>
                   </a:txBody>
@@ -7094,6 +7070,271 @@
                           </a:solidFill>
                           <a:latin typeface="Calibri"/>
                         </a:rPr>
+                        <a:t>ППК Тюмень</a:t>
+                      </a:r>
+                    </a:p>
+                  </a:txBody>
+                  <a:tcPr anchor="ctr" marL="25400" marR="25400" marT="12700" marB="12700">
+                    <a:solidFill>
+                      <a:srgbClr val="FFD2D8"/>
+                    </a:solidFill>
+                    <a:lnL w="6350" cap="flat" cmpd="sng" algn="ctr">
+                      <a:solidFill>
+                        <a:srgbClr val="E8C4C8"/>
+                      </a:solidFill>
+                    </a:lnL>
+                    <a:lnR w="6350" cap="flat" cmpd="sng" algn="ctr">
+                      <a:solidFill>
+                        <a:srgbClr val="E8C4C8"/>
+                      </a:solidFill>
+                    </a:lnR>
+                    <a:lnT w="6350" cap="flat" cmpd="sng" algn="ctr">
+                      <a:solidFill>
+                        <a:srgbClr val="E8C4C8"/>
+                      </a:solidFill>
+                    </a:lnT>
+                    <a:lnB w="6350" cap="flat" cmpd="sng" algn="ctr">
+                      <a:solidFill>
+                        <a:srgbClr val="E8C4C8"/>
+                      </a:solidFill>
+                    </a:lnB>
+                  </a:tcPr>
+                </a:tc>
+                <a:tc>
+                  <a:txBody>
+                    <a:bodyPr wrap="square"/>
+                    <a:lstStyle/>
+                    <a:p>
+                      <a:pPr algn="ctr">
+                        <a:lnSpc>
+                          <a:spcPct val="100000"/>
+                        </a:lnSpc>
+                        <a:spcBef>
+                          <a:spcPts val="0"/>
+                        </a:spcBef>
+                        <a:spcAft>
+                          <a:spcPts val="0"/>
+                        </a:spcAft>
+                      </a:pPr>
+                      <a:r>
+                        <a:rPr sz="500" b="0">
+                          <a:solidFill>
+                            <a:srgbClr val="962837"/>
+                          </a:solidFill>
+                          <a:latin typeface="Calibri"/>
+                        </a:rPr>
+                        <a:t>ППК Москва МСП</a:t>
+                      </a:r>
+                    </a:p>
+                  </a:txBody>
+                  <a:tcPr anchor="ctr" marL="25400" marR="25400" marT="12700" marB="12700">
+                    <a:solidFill>
+                      <a:srgbClr val="FFD2D8"/>
+                    </a:solidFill>
+                    <a:lnL w="6350" cap="flat" cmpd="sng" algn="ctr">
+                      <a:solidFill>
+                        <a:srgbClr val="E8C4C8"/>
+                      </a:solidFill>
+                    </a:lnL>
+                    <a:lnR w="6350" cap="flat" cmpd="sng" algn="ctr">
+                      <a:solidFill>
+                        <a:srgbClr val="E8C4C8"/>
+                      </a:solidFill>
+                    </a:lnR>
+                    <a:lnT w="6350" cap="flat" cmpd="sng" algn="ctr">
+                      <a:solidFill>
+                        <a:srgbClr val="E8C4C8"/>
+                      </a:solidFill>
+                    </a:lnT>
+                    <a:lnB w="6350" cap="flat" cmpd="sng" algn="ctr">
+                      <a:solidFill>
+                        <a:srgbClr val="E8C4C8"/>
+                      </a:solidFill>
+                    </a:lnB>
+                  </a:tcPr>
+                </a:tc>
+                <a:tc>
+                  <a:txBody>
+                    <a:bodyPr wrap="square"/>
+                    <a:lstStyle/>
+                    <a:p>
+                      <a:pPr algn="l">
+                        <a:lnSpc>
+                          <a:spcPct val="100000"/>
+                        </a:lnSpc>
+                        <a:spcBef>
+                          <a:spcPts val="0"/>
+                        </a:spcBef>
+                        <a:spcAft>
+                          <a:spcPts val="0"/>
+                        </a:spcAft>
+                      </a:pPr>
+                      <a:r>
+                        <a:rPr sz="500" b="0">
+                          <a:solidFill>
+                            <a:srgbClr val="323232"/>
+                          </a:solidFill>
+                          <a:latin typeface="Calibri"/>
+                        </a:rPr>
+                        <a:t/>
+                      </a:r>
+                    </a:p>
+                  </a:txBody>
+                  <a:tcPr anchor="ctr" marL="25400" marR="25400" marT="12700" marB="12700">
+                    <a:solidFill>
+                      <a:srgbClr val="FFFFFF"/>
+                    </a:solidFill>
+                    <a:lnL w="6350" cap="flat" cmpd="sng" algn="ctr">
+                      <a:solidFill>
+                        <a:srgbClr val="E8C4C8"/>
+                      </a:solidFill>
+                    </a:lnL>
+                    <a:lnR w="6350" cap="flat" cmpd="sng" algn="ctr">
+                      <a:solidFill>
+                        <a:srgbClr val="E8C4C8"/>
+                      </a:solidFill>
+                    </a:lnR>
+                    <a:lnT w="6350" cap="flat" cmpd="sng" algn="ctr">
+                      <a:solidFill>
+                        <a:srgbClr val="E8C4C8"/>
+                      </a:solidFill>
+                    </a:lnT>
+                    <a:lnB w="6350" cap="flat" cmpd="sng" algn="ctr">
+                      <a:solidFill>
+                        <a:srgbClr val="E8C4C8"/>
+                      </a:solidFill>
+                    </a:lnB>
+                  </a:tcPr>
+                </a:tc>
+                <a:tc>
+                  <a:txBody>
+                    <a:bodyPr wrap="square"/>
+                    <a:lstStyle/>
+                    <a:p>
+                      <a:pPr algn="ctr">
+                        <a:lnSpc>
+                          <a:spcPct val="100000"/>
+                        </a:lnSpc>
+                        <a:spcBef>
+                          <a:spcPts val="0"/>
+                        </a:spcBef>
+                        <a:spcAft>
+                          <a:spcPts val="0"/>
+                        </a:spcAft>
+                      </a:pPr>
+                      <a:r>
+                        <a:rPr sz="500" b="0">
+                          <a:solidFill>
+                            <a:srgbClr val="962837"/>
+                          </a:solidFill>
+                          <a:latin typeface="Calibri"/>
+                        </a:rPr>
+                        <a:t>КЦ</a:t>
+                      </a:r>
+                    </a:p>
+                  </a:txBody>
+                  <a:tcPr anchor="ctr" marL="25400" marR="25400" marT="12700" marB="12700">
+                    <a:solidFill>
+                      <a:srgbClr val="FFD2D8"/>
+                    </a:solidFill>
+                    <a:lnL w="6350" cap="flat" cmpd="sng" algn="ctr">
+                      <a:solidFill>
+                        <a:srgbClr val="E8C4C8"/>
+                      </a:solidFill>
+                    </a:lnL>
+                    <a:lnR w="6350" cap="flat" cmpd="sng" algn="ctr">
+                      <a:solidFill>
+                        <a:srgbClr val="E8C4C8"/>
+                      </a:solidFill>
+                    </a:lnR>
+                    <a:lnT w="6350" cap="flat" cmpd="sng" algn="ctr">
+                      <a:solidFill>
+                        <a:srgbClr val="E8C4C8"/>
+                      </a:solidFill>
+                    </a:lnT>
+                    <a:lnB w="6350" cap="flat" cmpd="sng" algn="ctr">
+                      <a:solidFill>
+                        <a:srgbClr val="E8C4C8"/>
+                      </a:solidFill>
+                    </a:lnB>
+                  </a:tcPr>
+                </a:tc>
+                <a:tc>
+                  <a:txBody>
+                    <a:bodyPr wrap="square"/>
+                    <a:lstStyle/>
+                    <a:p>
+                      <a:pPr algn="l">
+                        <a:lnSpc>
+                          <a:spcPct val="100000"/>
+                        </a:lnSpc>
+                        <a:spcBef>
+                          <a:spcPts val="0"/>
+                        </a:spcBef>
+                        <a:spcAft>
+                          <a:spcPts val="0"/>
+                        </a:spcAft>
+                      </a:pPr>
+                      <a:r>
+                        <a:rPr sz="500" b="0">
+                          <a:solidFill>
+                            <a:srgbClr val="323232"/>
+                          </a:solidFill>
+                          <a:latin typeface="Calibri"/>
+                        </a:rPr>
+                        <a:t/>
+                      </a:r>
+                    </a:p>
+                  </a:txBody>
+                  <a:tcPr anchor="ctr" marL="25400" marR="25400" marT="12700" marB="12700">
+                    <a:solidFill>
+                      <a:srgbClr val="FFFFFF"/>
+                    </a:solidFill>
+                    <a:lnL w="6350" cap="flat" cmpd="sng" algn="ctr">
+                      <a:solidFill>
+                        <a:srgbClr val="E8C4C8"/>
+                      </a:solidFill>
+                    </a:lnL>
+                    <a:lnR w="6350" cap="flat" cmpd="sng" algn="ctr">
+                      <a:solidFill>
+                        <a:srgbClr val="E8C4C8"/>
+                      </a:solidFill>
+                    </a:lnR>
+                    <a:lnT w="6350" cap="flat" cmpd="sng" algn="ctr">
+                      <a:solidFill>
+                        <a:srgbClr val="E8C4C8"/>
+                      </a:solidFill>
+                    </a:lnT>
+                    <a:lnB w="6350" cap="flat" cmpd="sng" algn="ctr">
+                      <a:solidFill>
+                        <a:srgbClr val="E8C4C8"/>
+                      </a:solidFill>
+                    </a:lnB>
+                  </a:tcPr>
+                </a:tc>
+                <a:tc>
+                  <a:txBody>
+                    <a:bodyPr wrap="square"/>
+                    <a:lstStyle/>
+                    <a:p>
+                      <a:pPr algn="ctr">
+                        <a:lnSpc>
+                          <a:spcPct val="100000"/>
+                        </a:lnSpc>
+                        <a:spcBef>
+                          <a:spcPts val="0"/>
+                        </a:spcBef>
+                        <a:spcAft>
+                          <a:spcPts val="0"/>
+                        </a:spcAft>
+                      </a:pPr>
+                      <a:r>
+                        <a:rPr sz="500" b="0">
+                          <a:solidFill>
+                            <a:srgbClr val="962837"/>
+                          </a:solidFill>
+                          <a:latin typeface="Calibri"/>
+                        </a:rPr>
                         <a:t>Честный знак</a:t>
                       </a:r>
                     </a:p>
@@ -7101,271 +7342,6 @@
                   <a:tcPr anchor="ctr" marL="25400" marR="25400" marT="12700" marB="12700">
                     <a:solidFill>
                       <a:srgbClr val="FFD2D8"/>
-                    </a:solidFill>
-                    <a:lnL w="6350" cap="flat" cmpd="sng" algn="ctr">
-                      <a:solidFill>
-                        <a:srgbClr val="E8C4C8"/>
-                      </a:solidFill>
-                    </a:lnL>
-                    <a:lnR w="6350" cap="flat" cmpd="sng" algn="ctr">
-                      <a:solidFill>
-                        <a:srgbClr val="E8C4C8"/>
-                      </a:solidFill>
-                    </a:lnR>
-                    <a:lnT w="6350" cap="flat" cmpd="sng" algn="ctr">
-                      <a:solidFill>
-                        <a:srgbClr val="E8C4C8"/>
-                      </a:solidFill>
-                    </a:lnT>
-                    <a:lnB w="6350" cap="flat" cmpd="sng" algn="ctr">
-                      <a:solidFill>
-                        <a:srgbClr val="E8C4C8"/>
-                      </a:solidFill>
-                    </a:lnB>
-                  </a:tcPr>
-                </a:tc>
-                <a:tc>
-                  <a:txBody>
-                    <a:bodyPr wrap="square"/>
-                    <a:lstStyle/>
-                    <a:p>
-                      <a:pPr algn="ctr">
-                        <a:lnSpc>
-                          <a:spcPct val="100000"/>
-                        </a:lnSpc>
-                        <a:spcBef>
-                          <a:spcPts val="0"/>
-                        </a:spcBef>
-                        <a:spcAft>
-                          <a:spcPts val="0"/>
-                        </a:spcAft>
-                      </a:pPr>
-                      <a:r>
-                        <a:rPr sz="500" b="0">
-                          <a:solidFill>
-                            <a:srgbClr val="962837"/>
-                          </a:solidFill>
-                          <a:latin typeface="Calibri"/>
-                        </a:rPr>
-                        <a:t>ППК Тюмень</a:t>
-                      </a:r>
-                    </a:p>
-                  </a:txBody>
-                  <a:tcPr anchor="ctr" marL="25400" marR="25400" marT="12700" marB="12700">
-                    <a:solidFill>
-                      <a:srgbClr val="FFD2D8"/>
-                    </a:solidFill>
-                    <a:lnL w="6350" cap="flat" cmpd="sng" algn="ctr">
-                      <a:solidFill>
-                        <a:srgbClr val="E8C4C8"/>
-                      </a:solidFill>
-                    </a:lnL>
-                    <a:lnR w="6350" cap="flat" cmpd="sng" algn="ctr">
-                      <a:solidFill>
-                        <a:srgbClr val="E8C4C8"/>
-                      </a:solidFill>
-                    </a:lnR>
-                    <a:lnT w="6350" cap="flat" cmpd="sng" algn="ctr">
-                      <a:solidFill>
-                        <a:srgbClr val="E8C4C8"/>
-                      </a:solidFill>
-                    </a:lnT>
-                    <a:lnB w="6350" cap="flat" cmpd="sng" algn="ctr">
-                      <a:solidFill>
-                        <a:srgbClr val="E8C4C8"/>
-                      </a:solidFill>
-                    </a:lnB>
-                  </a:tcPr>
-                </a:tc>
-                <a:tc>
-                  <a:txBody>
-                    <a:bodyPr wrap="square"/>
-                    <a:lstStyle/>
-                    <a:p>
-                      <a:pPr algn="ctr">
-                        <a:lnSpc>
-                          <a:spcPct val="100000"/>
-                        </a:lnSpc>
-                        <a:spcBef>
-                          <a:spcPts val="0"/>
-                        </a:spcBef>
-                        <a:spcAft>
-                          <a:spcPts val="0"/>
-                        </a:spcAft>
-                      </a:pPr>
-                      <a:r>
-                        <a:rPr sz="500" b="0">
-                          <a:solidFill>
-                            <a:srgbClr val="962837"/>
-                          </a:solidFill>
-                          <a:latin typeface="Calibri"/>
-                        </a:rPr>
-                        <a:t>ППК Москва МСП</a:t>
-                      </a:r>
-                    </a:p>
-                  </a:txBody>
-                  <a:tcPr anchor="ctr" marL="25400" marR="25400" marT="12700" marB="12700">
-                    <a:solidFill>
-                      <a:srgbClr val="FFD2D8"/>
-                    </a:solidFill>
-                    <a:lnL w="6350" cap="flat" cmpd="sng" algn="ctr">
-                      <a:solidFill>
-                        <a:srgbClr val="E8C4C8"/>
-                      </a:solidFill>
-                    </a:lnL>
-                    <a:lnR w="6350" cap="flat" cmpd="sng" algn="ctr">
-                      <a:solidFill>
-                        <a:srgbClr val="E8C4C8"/>
-                      </a:solidFill>
-                    </a:lnR>
-                    <a:lnT w="6350" cap="flat" cmpd="sng" algn="ctr">
-                      <a:solidFill>
-                        <a:srgbClr val="E8C4C8"/>
-                      </a:solidFill>
-                    </a:lnT>
-                    <a:lnB w="6350" cap="flat" cmpd="sng" algn="ctr">
-                      <a:solidFill>
-                        <a:srgbClr val="E8C4C8"/>
-                      </a:solidFill>
-                    </a:lnB>
-                  </a:tcPr>
-                </a:tc>
-                <a:tc>
-                  <a:txBody>
-                    <a:bodyPr wrap="square"/>
-                    <a:lstStyle/>
-                    <a:p>
-                      <a:pPr algn="l">
-                        <a:lnSpc>
-                          <a:spcPct val="100000"/>
-                        </a:lnSpc>
-                        <a:spcBef>
-                          <a:spcPts val="0"/>
-                        </a:spcBef>
-                        <a:spcAft>
-                          <a:spcPts val="0"/>
-                        </a:spcAft>
-                      </a:pPr>
-                      <a:r>
-                        <a:rPr sz="500" b="0">
-                          <a:solidFill>
-                            <a:srgbClr val="323232"/>
-                          </a:solidFill>
-                          <a:latin typeface="Calibri"/>
-                        </a:rPr>
-                        <a:t/>
-                      </a:r>
-                    </a:p>
-                  </a:txBody>
-                  <a:tcPr anchor="ctr" marL="25400" marR="25400" marT="12700" marB="12700">
-                    <a:solidFill>
-                      <a:srgbClr val="FFFFFF"/>
-                    </a:solidFill>
-                    <a:lnL w="6350" cap="flat" cmpd="sng" algn="ctr">
-                      <a:solidFill>
-                        <a:srgbClr val="E8C4C8"/>
-                      </a:solidFill>
-                    </a:lnL>
-                    <a:lnR w="6350" cap="flat" cmpd="sng" algn="ctr">
-                      <a:solidFill>
-                        <a:srgbClr val="E8C4C8"/>
-                      </a:solidFill>
-                    </a:lnR>
-                    <a:lnT w="6350" cap="flat" cmpd="sng" algn="ctr">
-                      <a:solidFill>
-                        <a:srgbClr val="E8C4C8"/>
-                      </a:solidFill>
-                    </a:lnT>
-                    <a:lnB w="6350" cap="flat" cmpd="sng" algn="ctr">
-                      <a:solidFill>
-                        <a:srgbClr val="E8C4C8"/>
-                      </a:solidFill>
-                    </a:lnB>
-                  </a:tcPr>
-                </a:tc>
-                <a:tc>
-                  <a:txBody>
-                    <a:bodyPr wrap="square"/>
-                    <a:lstStyle/>
-                    <a:p>
-                      <a:pPr algn="ctr">
-                        <a:lnSpc>
-                          <a:spcPct val="100000"/>
-                        </a:lnSpc>
-                        <a:spcBef>
-                          <a:spcPts val="0"/>
-                        </a:spcBef>
-                        <a:spcAft>
-                          <a:spcPts val="0"/>
-                        </a:spcAft>
-                      </a:pPr>
-                      <a:r>
-                        <a:rPr sz="500" b="0">
-                          <a:solidFill>
-                            <a:srgbClr val="962837"/>
-                          </a:solidFill>
-                          <a:latin typeface="Calibri"/>
-                        </a:rPr>
-                        <a:t>КЦ</a:t>
-                      </a:r>
-                    </a:p>
-                  </a:txBody>
-                  <a:tcPr anchor="ctr" marL="25400" marR="25400" marT="12700" marB="12700">
-                    <a:solidFill>
-                      <a:srgbClr val="FFD2D8"/>
-                    </a:solidFill>
-                    <a:lnL w="6350" cap="flat" cmpd="sng" algn="ctr">
-                      <a:solidFill>
-                        <a:srgbClr val="E8C4C8"/>
-                      </a:solidFill>
-                    </a:lnL>
-                    <a:lnR w="6350" cap="flat" cmpd="sng" algn="ctr">
-                      <a:solidFill>
-                        <a:srgbClr val="E8C4C8"/>
-                      </a:solidFill>
-                    </a:lnR>
-                    <a:lnT w="6350" cap="flat" cmpd="sng" algn="ctr">
-                      <a:solidFill>
-                        <a:srgbClr val="E8C4C8"/>
-                      </a:solidFill>
-                    </a:lnT>
-                    <a:lnB w="6350" cap="flat" cmpd="sng" algn="ctr">
-                      <a:solidFill>
-                        <a:srgbClr val="E8C4C8"/>
-                      </a:solidFill>
-                    </a:lnB>
-                  </a:tcPr>
-                </a:tc>
-                <a:tc>
-                  <a:txBody>
-                    <a:bodyPr wrap="square"/>
-                    <a:lstStyle/>
-                    <a:p>
-                      <a:pPr algn="l">
-                        <a:lnSpc>
-                          <a:spcPct val="100000"/>
-                        </a:lnSpc>
-                        <a:spcBef>
-                          <a:spcPts val="0"/>
-                        </a:spcBef>
-                        <a:spcAft>
-                          <a:spcPts val="0"/>
-                        </a:spcAft>
-                      </a:pPr>
-                      <a:r>
-                        <a:rPr sz="500" b="0">
-                          <a:solidFill>
-                            <a:srgbClr val="323232"/>
-                          </a:solidFill>
-                          <a:latin typeface="Calibri"/>
-                        </a:rPr>
-                        <a:t/>
-                      </a:r>
-                    </a:p>
-                  </a:txBody>
-                  <a:tcPr anchor="ctr" marL="25400" marR="25400" marT="12700" marB="12700">
-                    <a:solidFill>
-                      <a:srgbClr val="FFFFFF"/>
                     </a:solidFill>
                     <a:lnL w="6350" cap="flat" cmpd="sng" algn="ctr">
                       <a:solidFill>
@@ -9785,6 +9761,165 @@
                     <a:bodyPr wrap="square"/>
                     <a:lstStyle/>
                     <a:p>
+                      <a:pPr algn="l">
+                        <a:lnSpc>
+                          <a:spcPct val="100000"/>
+                        </a:lnSpc>
+                        <a:spcBef>
+                          <a:spcPts val="0"/>
+                        </a:spcBef>
+                        <a:spcAft>
+                          <a:spcPts val="0"/>
+                        </a:spcAft>
+                      </a:pPr>
+                      <a:r>
+                        <a:rPr sz="500" b="0">
+                          <a:solidFill>
+                            <a:srgbClr val="323232"/>
+                          </a:solidFill>
+                          <a:latin typeface="Calibri"/>
+                        </a:rPr>
+                        <a:t/>
+                      </a:r>
+                    </a:p>
+                  </a:txBody>
+                  <a:tcPr anchor="ctr" marL="25400" marR="25400" marT="12700" marB="12700">
+                    <a:solidFill>
+                      <a:srgbClr val="FCF8F9"/>
+                    </a:solidFill>
+                    <a:lnL w="6350" cap="flat" cmpd="sng" algn="ctr">
+                      <a:solidFill>
+                        <a:srgbClr val="E8C4C8"/>
+                      </a:solidFill>
+                    </a:lnL>
+                    <a:lnR w="6350" cap="flat" cmpd="sng" algn="ctr">
+                      <a:solidFill>
+                        <a:srgbClr val="E8C4C8"/>
+                      </a:solidFill>
+                    </a:lnR>
+                    <a:lnT w="6350" cap="flat" cmpd="sng" algn="ctr">
+                      <a:solidFill>
+                        <a:srgbClr val="E8C4C8"/>
+                      </a:solidFill>
+                    </a:lnT>
+                    <a:lnB w="6350" cap="flat" cmpd="sng" algn="ctr">
+                      <a:solidFill>
+                        <a:srgbClr val="E8C4C8"/>
+                      </a:solidFill>
+                    </a:lnB>
+                  </a:tcPr>
+                </a:tc>
+                <a:tc>
+                  <a:txBody>
+                    <a:bodyPr wrap="square"/>
+                    <a:lstStyle/>
+                    <a:p>
+                      <a:pPr algn="l">
+                        <a:lnSpc>
+                          <a:spcPct val="100000"/>
+                        </a:lnSpc>
+                        <a:spcBef>
+                          <a:spcPts val="0"/>
+                        </a:spcBef>
+                        <a:spcAft>
+                          <a:spcPts val="0"/>
+                        </a:spcAft>
+                      </a:pPr>
+                      <a:r>
+                        <a:rPr sz="500" b="0">
+                          <a:solidFill>
+                            <a:srgbClr val="323232"/>
+                          </a:solidFill>
+                          <a:latin typeface="Calibri"/>
+                        </a:rPr>
+                        <a:t/>
+                      </a:r>
+                    </a:p>
+                  </a:txBody>
+                  <a:tcPr anchor="ctr" marL="25400" marR="25400" marT="12700" marB="12700">
+                    <a:solidFill>
+                      <a:srgbClr val="FCF8F9"/>
+                    </a:solidFill>
+                    <a:lnL w="6350" cap="flat" cmpd="sng" algn="ctr">
+                      <a:solidFill>
+                        <a:srgbClr val="E8C4C8"/>
+                      </a:solidFill>
+                    </a:lnL>
+                    <a:lnR w="6350" cap="flat" cmpd="sng" algn="ctr">
+                      <a:solidFill>
+                        <a:srgbClr val="E8C4C8"/>
+                      </a:solidFill>
+                    </a:lnR>
+                    <a:lnT w="6350" cap="flat" cmpd="sng" algn="ctr">
+                      <a:solidFill>
+                        <a:srgbClr val="E8C4C8"/>
+                      </a:solidFill>
+                    </a:lnT>
+                    <a:lnB w="6350" cap="flat" cmpd="sng" algn="ctr">
+                      <a:solidFill>
+                        <a:srgbClr val="E8C4C8"/>
+                      </a:solidFill>
+                    </a:lnB>
+                  </a:tcPr>
+                </a:tc>
+                <a:tc>
+                  <a:txBody>
+                    <a:bodyPr wrap="square"/>
+                    <a:lstStyle/>
+                    <a:p>
+                      <a:pPr algn="l">
+                        <a:lnSpc>
+                          <a:spcPct val="100000"/>
+                        </a:lnSpc>
+                        <a:spcBef>
+                          <a:spcPts val="0"/>
+                        </a:spcBef>
+                        <a:spcAft>
+                          <a:spcPts val="0"/>
+                        </a:spcAft>
+                      </a:pPr>
+                      <a:r>
+                        <a:rPr sz="500" b="0">
+                          <a:solidFill>
+                            <a:srgbClr val="323232"/>
+                          </a:solidFill>
+                          <a:latin typeface="Calibri"/>
+                        </a:rPr>
+                        <a:t/>
+                      </a:r>
+                    </a:p>
+                  </a:txBody>
+                  <a:tcPr anchor="ctr" marL="25400" marR="25400" marT="12700" marB="12700">
+                    <a:solidFill>
+                      <a:srgbClr val="FCF8F9"/>
+                    </a:solidFill>
+                    <a:lnL w="6350" cap="flat" cmpd="sng" algn="ctr">
+                      <a:solidFill>
+                        <a:srgbClr val="E8C4C8"/>
+                      </a:solidFill>
+                    </a:lnL>
+                    <a:lnR w="6350" cap="flat" cmpd="sng" algn="ctr">
+                      <a:solidFill>
+                        <a:srgbClr val="E8C4C8"/>
+                      </a:solidFill>
+                    </a:lnR>
+                    <a:lnT w="6350" cap="flat" cmpd="sng" algn="ctr">
+                      <a:solidFill>
+                        <a:srgbClr val="E8C4C8"/>
+                      </a:solidFill>
+                    </a:lnT>
+                    <a:lnB w="6350" cap="flat" cmpd="sng" algn="ctr">
+                      <a:solidFill>
+                        <a:srgbClr val="E8C4C8"/>
+                      </a:solidFill>
+                    </a:lnB>
+                  </a:tcPr>
+                </a:tc>
+                <a:tc>
+                  <a:txBody>
+                    <a:bodyPr wrap="square"/>
+                    <a:lstStyle/>
+                    <a:p>
                       <a:pPr algn="ctr">
                         <a:lnSpc>
                           <a:spcPct val="100000"/>
@@ -9803,6 +9938,112 @@
                           </a:solidFill>
                           <a:latin typeface="Calibri"/>
                         </a:rPr>
+                        <a:t>КЦ</a:t>
+                      </a:r>
+                    </a:p>
+                  </a:txBody>
+                  <a:tcPr anchor="ctr" marL="25400" marR="25400" marT="12700" marB="12700">
+                    <a:solidFill>
+                      <a:srgbClr val="FFD2D8"/>
+                    </a:solidFill>
+                    <a:lnL w="6350" cap="flat" cmpd="sng" algn="ctr">
+                      <a:solidFill>
+                        <a:srgbClr val="E8C4C8"/>
+                      </a:solidFill>
+                    </a:lnL>
+                    <a:lnR w="6350" cap="flat" cmpd="sng" algn="ctr">
+                      <a:solidFill>
+                        <a:srgbClr val="E8C4C8"/>
+                      </a:solidFill>
+                    </a:lnR>
+                    <a:lnT w="6350" cap="flat" cmpd="sng" algn="ctr">
+                      <a:solidFill>
+                        <a:srgbClr val="E8C4C8"/>
+                      </a:solidFill>
+                    </a:lnT>
+                    <a:lnB w="6350" cap="flat" cmpd="sng" algn="ctr">
+                      <a:solidFill>
+                        <a:srgbClr val="E8C4C8"/>
+                      </a:solidFill>
+                    </a:lnB>
+                  </a:tcPr>
+                </a:tc>
+                <a:tc>
+                  <a:txBody>
+                    <a:bodyPr wrap="square"/>
+                    <a:lstStyle/>
+                    <a:p>
+                      <a:pPr algn="l">
+                        <a:lnSpc>
+                          <a:spcPct val="100000"/>
+                        </a:lnSpc>
+                        <a:spcBef>
+                          <a:spcPts val="0"/>
+                        </a:spcBef>
+                        <a:spcAft>
+                          <a:spcPts val="0"/>
+                        </a:spcAft>
+                      </a:pPr>
+                      <a:r>
+                        <a:rPr sz="500" b="0">
+                          <a:solidFill>
+                            <a:srgbClr val="323232"/>
+                          </a:solidFill>
+                          <a:latin typeface="Calibri"/>
+                        </a:rPr>
+                        <a:t/>
+                      </a:r>
+                    </a:p>
+                  </a:txBody>
+                  <a:tcPr anchor="ctr" marL="25400" marR="25400" marT="12700" marB="12700">
+                    <a:solidFill>
+                      <a:srgbClr val="FCF8F9"/>
+                    </a:solidFill>
+                    <a:lnL w="6350" cap="flat" cmpd="sng" algn="ctr">
+                      <a:solidFill>
+                        <a:srgbClr val="E8C4C8"/>
+                      </a:solidFill>
+                    </a:lnL>
+                    <a:lnR w="6350" cap="flat" cmpd="sng" algn="ctr">
+                      <a:solidFill>
+                        <a:srgbClr val="E8C4C8"/>
+                      </a:solidFill>
+                    </a:lnR>
+                    <a:lnT w="6350" cap="flat" cmpd="sng" algn="ctr">
+                      <a:solidFill>
+                        <a:srgbClr val="E8C4C8"/>
+                      </a:solidFill>
+                    </a:lnT>
+                    <a:lnB w="6350" cap="flat" cmpd="sng" algn="ctr">
+                      <a:solidFill>
+                        <a:srgbClr val="E8C4C8"/>
+                      </a:solidFill>
+                    </a:lnB>
+                  </a:tcPr>
+                </a:tc>
+                <a:tc>
+                  <a:txBody>
+                    <a:bodyPr wrap="square"/>
+                    <a:lstStyle/>
+                    <a:p>
+                      <a:pPr algn="ctr">
+                        <a:lnSpc>
+                          <a:spcPct val="100000"/>
+                        </a:lnSpc>
+                        <a:spcBef>
+                          <a:spcPts val="0"/>
+                        </a:spcBef>
+                        <a:spcAft>
+                          <a:spcPts val="0"/>
+                        </a:spcAft>
+                      </a:pPr>
+                      <a:r>
+                        <a:rPr sz="500" b="0">
+                          <a:solidFill>
+                            <a:srgbClr val="962837"/>
+                          </a:solidFill>
+                          <a:latin typeface="Calibri"/>
+                        </a:rPr>
                         <a:t>Честный знак</a:t>
                       </a:r>
                     </a:p>
@@ -9810,271 +10051,6 @@
                   <a:tcPr anchor="ctr" marL="25400" marR="25400" marT="12700" marB="12700">
                     <a:solidFill>
                       <a:srgbClr val="FFD2D8"/>
-                    </a:solidFill>
-                    <a:lnL w="6350" cap="flat" cmpd="sng" algn="ctr">
-                      <a:solidFill>
-                        <a:srgbClr val="E8C4C8"/>
-                      </a:solidFill>
-                    </a:lnL>
-                    <a:lnR w="6350" cap="flat" cmpd="sng" algn="ctr">
-                      <a:solidFill>
-                        <a:srgbClr val="E8C4C8"/>
-                      </a:solidFill>
-                    </a:lnR>
-                    <a:lnT w="6350" cap="flat" cmpd="sng" algn="ctr">
-                      <a:solidFill>
-                        <a:srgbClr val="E8C4C8"/>
-                      </a:solidFill>
-                    </a:lnT>
-                    <a:lnB w="6350" cap="flat" cmpd="sng" algn="ctr">
-                      <a:solidFill>
-                        <a:srgbClr val="E8C4C8"/>
-                      </a:solidFill>
-                    </a:lnB>
-                  </a:tcPr>
-                </a:tc>
-                <a:tc>
-                  <a:txBody>
-                    <a:bodyPr wrap="square"/>
-                    <a:lstStyle/>
-                    <a:p>
-                      <a:pPr algn="l">
-                        <a:lnSpc>
-                          <a:spcPct val="100000"/>
-                        </a:lnSpc>
-                        <a:spcBef>
-                          <a:spcPts val="0"/>
-                        </a:spcBef>
-                        <a:spcAft>
-                          <a:spcPts val="0"/>
-                        </a:spcAft>
-                      </a:pPr>
-                      <a:r>
-                        <a:rPr sz="500" b="0">
-                          <a:solidFill>
-                            <a:srgbClr val="323232"/>
-                          </a:solidFill>
-                          <a:latin typeface="Calibri"/>
-                        </a:rPr>
-                        <a:t/>
-                      </a:r>
-                    </a:p>
-                  </a:txBody>
-                  <a:tcPr anchor="ctr" marL="25400" marR="25400" marT="12700" marB="12700">
-                    <a:solidFill>
-                      <a:srgbClr val="FCF8F9"/>
-                    </a:solidFill>
-                    <a:lnL w="6350" cap="flat" cmpd="sng" algn="ctr">
-                      <a:solidFill>
-                        <a:srgbClr val="E8C4C8"/>
-                      </a:solidFill>
-                    </a:lnL>
-                    <a:lnR w="6350" cap="flat" cmpd="sng" algn="ctr">
-                      <a:solidFill>
-                        <a:srgbClr val="E8C4C8"/>
-                      </a:solidFill>
-                    </a:lnR>
-                    <a:lnT w="6350" cap="flat" cmpd="sng" algn="ctr">
-                      <a:solidFill>
-                        <a:srgbClr val="E8C4C8"/>
-                      </a:solidFill>
-                    </a:lnT>
-                    <a:lnB w="6350" cap="flat" cmpd="sng" algn="ctr">
-                      <a:solidFill>
-                        <a:srgbClr val="E8C4C8"/>
-                      </a:solidFill>
-                    </a:lnB>
-                  </a:tcPr>
-                </a:tc>
-                <a:tc>
-                  <a:txBody>
-                    <a:bodyPr wrap="square"/>
-                    <a:lstStyle/>
-                    <a:p>
-                      <a:pPr algn="l">
-                        <a:lnSpc>
-                          <a:spcPct val="100000"/>
-                        </a:lnSpc>
-                        <a:spcBef>
-                          <a:spcPts val="0"/>
-                        </a:spcBef>
-                        <a:spcAft>
-                          <a:spcPts val="0"/>
-                        </a:spcAft>
-                      </a:pPr>
-                      <a:r>
-                        <a:rPr sz="500" b="0">
-                          <a:solidFill>
-                            <a:srgbClr val="323232"/>
-                          </a:solidFill>
-                          <a:latin typeface="Calibri"/>
-                        </a:rPr>
-                        <a:t/>
-                      </a:r>
-                    </a:p>
-                  </a:txBody>
-                  <a:tcPr anchor="ctr" marL="25400" marR="25400" marT="12700" marB="12700">
-                    <a:solidFill>
-                      <a:srgbClr val="FCF8F9"/>
-                    </a:solidFill>
-                    <a:lnL w="6350" cap="flat" cmpd="sng" algn="ctr">
-                      <a:solidFill>
-                        <a:srgbClr val="E8C4C8"/>
-                      </a:solidFill>
-                    </a:lnL>
-                    <a:lnR w="6350" cap="flat" cmpd="sng" algn="ctr">
-                      <a:solidFill>
-                        <a:srgbClr val="E8C4C8"/>
-                      </a:solidFill>
-                    </a:lnR>
-                    <a:lnT w="6350" cap="flat" cmpd="sng" algn="ctr">
-                      <a:solidFill>
-                        <a:srgbClr val="E8C4C8"/>
-                      </a:solidFill>
-                    </a:lnT>
-                    <a:lnB w="6350" cap="flat" cmpd="sng" algn="ctr">
-                      <a:solidFill>
-                        <a:srgbClr val="E8C4C8"/>
-                      </a:solidFill>
-                    </a:lnB>
-                  </a:tcPr>
-                </a:tc>
-                <a:tc>
-                  <a:txBody>
-                    <a:bodyPr wrap="square"/>
-                    <a:lstStyle/>
-                    <a:p>
-                      <a:pPr algn="l">
-                        <a:lnSpc>
-                          <a:spcPct val="100000"/>
-                        </a:lnSpc>
-                        <a:spcBef>
-                          <a:spcPts val="0"/>
-                        </a:spcBef>
-                        <a:spcAft>
-                          <a:spcPts val="0"/>
-                        </a:spcAft>
-                      </a:pPr>
-                      <a:r>
-                        <a:rPr sz="500" b="0">
-                          <a:solidFill>
-                            <a:srgbClr val="323232"/>
-                          </a:solidFill>
-                          <a:latin typeface="Calibri"/>
-                        </a:rPr>
-                        <a:t/>
-                      </a:r>
-                    </a:p>
-                  </a:txBody>
-                  <a:tcPr anchor="ctr" marL="25400" marR="25400" marT="12700" marB="12700">
-                    <a:solidFill>
-                      <a:srgbClr val="FCF8F9"/>
-                    </a:solidFill>
-                    <a:lnL w="6350" cap="flat" cmpd="sng" algn="ctr">
-                      <a:solidFill>
-                        <a:srgbClr val="E8C4C8"/>
-                      </a:solidFill>
-                    </a:lnL>
-                    <a:lnR w="6350" cap="flat" cmpd="sng" algn="ctr">
-                      <a:solidFill>
-                        <a:srgbClr val="E8C4C8"/>
-                      </a:solidFill>
-                    </a:lnR>
-                    <a:lnT w="6350" cap="flat" cmpd="sng" algn="ctr">
-                      <a:solidFill>
-                        <a:srgbClr val="E8C4C8"/>
-                      </a:solidFill>
-                    </a:lnT>
-                    <a:lnB w="6350" cap="flat" cmpd="sng" algn="ctr">
-                      <a:solidFill>
-                        <a:srgbClr val="E8C4C8"/>
-                      </a:solidFill>
-                    </a:lnB>
-                  </a:tcPr>
-                </a:tc>
-                <a:tc>
-                  <a:txBody>
-                    <a:bodyPr wrap="square"/>
-                    <a:lstStyle/>
-                    <a:p>
-                      <a:pPr algn="ctr">
-                        <a:lnSpc>
-                          <a:spcPct val="100000"/>
-                        </a:lnSpc>
-                        <a:spcBef>
-                          <a:spcPts val="0"/>
-                        </a:spcBef>
-                        <a:spcAft>
-                          <a:spcPts val="0"/>
-                        </a:spcAft>
-                      </a:pPr>
-                      <a:r>
-                        <a:rPr sz="500" b="0">
-                          <a:solidFill>
-                            <a:srgbClr val="962837"/>
-                          </a:solidFill>
-                          <a:latin typeface="Calibri"/>
-                        </a:rPr>
-                        <a:t>КЦ</a:t>
-                      </a:r>
-                    </a:p>
-                  </a:txBody>
-                  <a:tcPr anchor="ctr" marL="25400" marR="25400" marT="12700" marB="12700">
-                    <a:solidFill>
-                      <a:srgbClr val="FFD2D8"/>
-                    </a:solidFill>
-                    <a:lnL w="6350" cap="flat" cmpd="sng" algn="ctr">
-                      <a:solidFill>
-                        <a:srgbClr val="E8C4C8"/>
-                      </a:solidFill>
-                    </a:lnL>
-                    <a:lnR w="6350" cap="flat" cmpd="sng" algn="ctr">
-                      <a:solidFill>
-                        <a:srgbClr val="E8C4C8"/>
-                      </a:solidFill>
-                    </a:lnR>
-                    <a:lnT w="6350" cap="flat" cmpd="sng" algn="ctr">
-                      <a:solidFill>
-                        <a:srgbClr val="E8C4C8"/>
-                      </a:solidFill>
-                    </a:lnT>
-                    <a:lnB w="6350" cap="flat" cmpd="sng" algn="ctr">
-                      <a:solidFill>
-                        <a:srgbClr val="E8C4C8"/>
-                      </a:solidFill>
-                    </a:lnB>
-                  </a:tcPr>
-                </a:tc>
-                <a:tc>
-                  <a:txBody>
-                    <a:bodyPr wrap="square"/>
-                    <a:lstStyle/>
-                    <a:p>
-                      <a:pPr algn="l">
-                        <a:lnSpc>
-                          <a:spcPct val="100000"/>
-                        </a:lnSpc>
-                        <a:spcBef>
-                          <a:spcPts val="0"/>
-                        </a:spcBef>
-                        <a:spcAft>
-                          <a:spcPts val="0"/>
-                        </a:spcAft>
-                      </a:pPr>
-                      <a:r>
-                        <a:rPr sz="500" b="0">
-                          <a:solidFill>
-                            <a:srgbClr val="323232"/>
-                          </a:solidFill>
-                          <a:latin typeface="Calibri"/>
-                        </a:rPr>
-                        <a:t/>
-                      </a:r>
-                    </a:p>
-                  </a:txBody>
-                  <a:tcPr anchor="ctr" marL="25400" marR="25400" marT="12700" marB="12700">
-                    <a:solidFill>
-                      <a:srgbClr val="FCF8F9"/>
                     </a:solidFill>
                     <a:lnL w="6350" cap="flat" cmpd="sng" algn="ctr">
                       <a:solidFill>
@@ -11609,59 +11585,6 @@
                           </a:solidFill>
                           <a:latin typeface="Calibri"/>
                         </a:rPr>
-                        <a:t>Честный знак</a:t>
-                      </a:r>
-                    </a:p>
-                  </a:txBody>
-                  <a:tcPr anchor="ctr" marL="25400" marR="25400" marT="12700" marB="12700">
-                    <a:solidFill>
-                      <a:srgbClr val="FFD2D8"/>
-                    </a:solidFill>
-                    <a:lnL w="6350" cap="flat" cmpd="sng" algn="ctr">
-                      <a:solidFill>
-                        <a:srgbClr val="E8C4C8"/>
-                      </a:solidFill>
-                    </a:lnL>
-                    <a:lnR w="6350" cap="flat" cmpd="sng" algn="ctr">
-                      <a:solidFill>
-                        <a:srgbClr val="E8C4C8"/>
-                      </a:solidFill>
-                    </a:lnR>
-                    <a:lnT w="6350" cap="flat" cmpd="sng" algn="ctr">
-                      <a:solidFill>
-                        <a:srgbClr val="E8C4C8"/>
-                      </a:solidFill>
-                    </a:lnT>
-                    <a:lnB w="6350" cap="flat" cmpd="sng" algn="ctr">
-                      <a:solidFill>
-                        <a:srgbClr val="E8C4C8"/>
-                      </a:solidFill>
-                    </a:lnB>
-                  </a:tcPr>
-                </a:tc>
-                <a:tc>
-                  <a:txBody>
-                    <a:bodyPr wrap="square"/>
-                    <a:lstStyle/>
-                    <a:p>
-                      <a:pPr algn="ctr">
-                        <a:lnSpc>
-                          <a:spcPct val="100000"/>
-                        </a:lnSpc>
-                        <a:spcBef>
-                          <a:spcPts val="0"/>
-                        </a:spcBef>
-                        <a:spcAft>
-                          <a:spcPts val="0"/>
-                        </a:spcAft>
-                      </a:pPr>
-                      <a:r>
-                        <a:rPr sz="500" b="0">
-                          <a:solidFill>
-                            <a:srgbClr val="962837"/>
-                          </a:solidFill>
-                          <a:latin typeface="Calibri"/>
-                        </a:rPr>
                         <a:t>ЦИ Липецк</a:t>
                       </a:r>
                     </a:p>
@@ -11906,6 +11829,59 @@
                     </a:lnB>
                   </a:tcPr>
                 </a:tc>
+                <a:tc>
+                  <a:txBody>
+                    <a:bodyPr wrap="square"/>
+                    <a:lstStyle/>
+                    <a:p>
+                      <a:pPr algn="ctr">
+                        <a:lnSpc>
+                          <a:spcPct val="100000"/>
+                        </a:lnSpc>
+                        <a:spcBef>
+                          <a:spcPts val="0"/>
+                        </a:spcBef>
+                        <a:spcAft>
+                          <a:spcPts val="0"/>
+                        </a:spcAft>
+                      </a:pPr>
+                      <a:r>
+                        <a:rPr sz="500" b="0">
+                          <a:solidFill>
+                            <a:srgbClr val="962837"/>
+                          </a:solidFill>
+                          <a:latin typeface="Calibri"/>
+                        </a:rPr>
+                        <a:t>Честный знак</a:t>
+                      </a:r>
+                    </a:p>
+                  </a:txBody>
+                  <a:tcPr anchor="ctr" marL="25400" marR="25400" marT="12700" marB="12700">
+                    <a:solidFill>
+                      <a:srgbClr val="FFD2D8"/>
+                    </a:solidFill>
+                    <a:lnL w="6350" cap="flat" cmpd="sng" algn="ctr">
+                      <a:solidFill>
+                        <a:srgbClr val="E8C4C8"/>
+                      </a:solidFill>
+                    </a:lnL>
+                    <a:lnR w="6350" cap="flat" cmpd="sng" algn="ctr">
+                      <a:solidFill>
+                        <a:srgbClr val="E8C4C8"/>
+                      </a:solidFill>
+                    </a:lnR>
+                    <a:lnT w="6350" cap="flat" cmpd="sng" algn="ctr">
+                      <a:solidFill>
+                        <a:srgbClr val="E8C4C8"/>
+                      </a:solidFill>
+                    </a:lnT>
+                    <a:lnB w="6350" cap="flat" cmpd="sng" algn="ctr">
+                      <a:solidFill>
+                        <a:srgbClr val="E8C4C8"/>
+                      </a:solidFill>
+                    </a:lnB>
+                  </a:tcPr>
+                </a:tc>
               </a:tr>
               <a:tr h="182880">
                 <a:tc>
@@ -12497,6 +12473,112 @@
                     <a:bodyPr wrap="square"/>
                     <a:lstStyle/>
                     <a:p>
+                      <a:pPr algn="ctr">
+                        <a:lnSpc>
+                          <a:spcPct val="100000"/>
+                        </a:lnSpc>
+                        <a:spcBef>
+                          <a:spcPts val="0"/>
+                        </a:spcBef>
+                        <a:spcAft>
+                          <a:spcPts val="0"/>
+                        </a:spcAft>
+                      </a:pPr>
+                      <a:r>
+                        <a:rPr sz="500" b="0">
+                          <a:solidFill>
+                            <a:srgbClr val="962837"/>
+                          </a:solidFill>
+                          <a:latin typeface="Calibri"/>
+                        </a:rPr>
+                        <a:t>ОП Тюмень</a:t>
+                      </a:r>
+                    </a:p>
+                  </a:txBody>
+                  <a:tcPr anchor="ctr" marL="25400" marR="25400" marT="12700" marB="12700">
+                    <a:solidFill>
+                      <a:srgbClr val="FFD2D8"/>
+                    </a:solidFill>
+                    <a:lnL w="6350" cap="flat" cmpd="sng" algn="ctr">
+                      <a:solidFill>
+                        <a:srgbClr val="E8C4C8"/>
+                      </a:solidFill>
+                    </a:lnL>
+                    <a:lnR w="6350" cap="flat" cmpd="sng" algn="ctr">
+                      <a:solidFill>
+                        <a:srgbClr val="E8C4C8"/>
+                      </a:solidFill>
+                    </a:lnR>
+                    <a:lnT w="6350" cap="flat" cmpd="sng" algn="ctr">
+                      <a:solidFill>
+                        <a:srgbClr val="E8C4C8"/>
+                      </a:solidFill>
+                    </a:lnT>
+                    <a:lnB w="6350" cap="flat" cmpd="sng" algn="ctr">
+                      <a:solidFill>
+                        <a:srgbClr val="E8C4C8"/>
+                      </a:solidFill>
+                    </a:lnB>
+                  </a:tcPr>
+                </a:tc>
+                <a:tc>
+                  <a:txBody>
+                    <a:bodyPr wrap="square"/>
+                    <a:lstStyle/>
+                    <a:p>
+                      <a:pPr algn="ctr">
+                        <a:lnSpc>
+                          <a:spcPct val="100000"/>
+                        </a:lnSpc>
+                        <a:spcBef>
+                          <a:spcPts val="0"/>
+                        </a:spcBef>
+                        <a:spcAft>
+                          <a:spcPts val="0"/>
+                        </a:spcAft>
+                      </a:pPr>
+                      <a:r>
+                        <a:rPr sz="500" b="0">
+                          <a:solidFill>
+                            <a:srgbClr val="962837"/>
+                          </a:solidFill>
+                          <a:latin typeface="Calibri"/>
+                        </a:rPr>
+                        <a:t>ОП Москва МСП</a:t>
+                      </a:r>
+                    </a:p>
+                  </a:txBody>
+                  <a:tcPr anchor="ctr" marL="25400" marR="25400" marT="12700" marB="12700">
+                    <a:solidFill>
+                      <a:srgbClr val="FFD2D8"/>
+                    </a:solidFill>
+                    <a:lnL w="6350" cap="flat" cmpd="sng" algn="ctr">
+                      <a:solidFill>
+                        <a:srgbClr val="E8C4C8"/>
+                      </a:solidFill>
+                    </a:lnL>
+                    <a:lnR w="6350" cap="flat" cmpd="sng" algn="ctr">
+                      <a:solidFill>
+                        <a:srgbClr val="E8C4C8"/>
+                      </a:solidFill>
+                    </a:lnR>
+                    <a:lnT w="6350" cap="flat" cmpd="sng" algn="ctr">
+                      <a:solidFill>
+                        <a:srgbClr val="E8C4C8"/>
+                      </a:solidFill>
+                    </a:lnT>
+                    <a:lnB w="6350" cap="flat" cmpd="sng" algn="ctr">
+                      <a:solidFill>
+                        <a:srgbClr val="E8C4C8"/>
+                      </a:solidFill>
+                    </a:lnB>
+                  </a:tcPr>
+                </a:tc>
+                <a:tc>
+                  <a:txBody>
+                    <a:bodyPr wrap="square"/>
+                    <a:lstStyle/>
+                    <a:p>
                       <a:pPr algn="l">
                         <a:lnSpc>
                           <a:spcPct val="100000"/>
@@ -12568,7 +12650,7 @@
                           </a:solidFill>
                           <a:latin typeface="Calibri"/>
                         </a:rPr>
-                        <a:t>ОП Тюмень</a:t>
+                        <a:t>КЦ</a:t>
                       </a:r>
                     </a:p>
                   </a:txBody>
@@ -12603,59 +12685,6 @@
                     <a:bodyPr wrap="square"/>
                     <a:lstStyle/>
                     <a:p>
-                      <a:pPr algn="ctr">
-                        <a:lnSpc>
-                          <a:spcPct val="100000"/>
-                        </a:lnSpc>
-                        <a:spcBef>
-                          <a:spcPts val="0"/>
-                        </a:spcBef>
-                        <a:spcAft>
-                          <a:spcPts val="0"/>
-                        </a:spcAft>
-                      </a:pPr>
-                      <a:r>
-                        <a:rPr sz="500" b="0">
-                          <a:solidFill>
-                            <a:srgbClr val="962837"/>
-                          </a:solidFill>
-                          <a:latin typeface="Calibri"/>
-                        </a:rPr>
-                        <a:t>ОП Москва МСП</a:t>
-                      </a:r>
-                    </a:p>
-                  </a:txBody>
-                  <a:tcPr anchor="ctr" marL="25400" marR="25400" marT="12700" marB="12700">
-                    <a:solidFill>
-                      <a:srgbClr val="FFD2D8"/>
-                    </a:solidFill>
-                    <a:lnL w="6350" cap="flat" cmpd="sng" algn="ctr">
-                      <a:solidFill>
-                        <a:srgbClr val="E8C4C8"/>
-                      </a:solidFill>
-                    </a:lnL>
-                    <a:lnR w="6350" cap="flat" cmpd="sng" algn="ctr">
-                      <a:solidFill>
-                        <a:srgbClr val="E8C4C8"/>
-                      </a:solidFill>
-                    </a:lnR>
-                    <a:lnT w="6350" cap="flat" cmpd="sng" algn="ctr">
-                      <a:solidFill>
-                        <a:srgbClr val="E8C4C8"/>
-                      </a:solidFill>
-                    </a:lnT>
-                    <a:lnB w="6350" cap="flat" cmpd="sng" algn="ctr">
-                      <a:solidFill>
-                        <a:srgbClr val="E8C4C8"/>
-                      </a:solidFill>
-                    </a:lnB>
-                  </a:tcPr>
-                </a:tc>
-                <a:tc>
-                  <a:txBody>
-                    <a:bodyPr wrap="square"/>
-                    <a:lstStyle/>
-                    <a:p>
                       <a:pPr algn="l">
                         <a:lnSpc>
                           <a:spcPct val="100000"/>
@@ -12681,59 +12710,6 @@
                   <a:tcPr anchor="ctr" marL="25400" marR="25400" marT="12700" marB="12700">
                     <a:solidFill>
                       <a:srgbClr val="FFFFFF"/>
-                    </a:solidFill>
-                    <a:lnL w="6350" cap="flat" cmpd="sng" algn="ctr">
-                      <a:solidFill>
-                        <a:srgbClr val="E8C4C8"/>
-                      </a:solidFill>
-                    </a:lnL>
-                    <a:lnR w="6350" cap="flat" cmpd="sng" algn="ctr">
-                      <a:solidFill>
-                        <a:srgbClr val="E8C4C8"/>
-                      </a:solidFill>
-                    </a:lnR>
-                    <a:lnT w="6350" cap="flat" cmpd="sng" algn="ctr">
-                      <a:solidFill>
-                        <a:srgbClr val="E8C4C8"/>
-                      </a:solidFill>
-                    </a:lnT>
-                    <a:lnB w="6350" cap="flat" cmpd="sng" algn="ctr">
-                      <a:solidFill>
-                        <a:srgbClr val="E8C4C8"/>
-                      </a:solidFill>
-                    </a:lnB>
-                  </a:tcPr>
-                </a:tc>
-                <a:tc>
-                  <a:txBody>
-                    <a:bodyPr wrap="square"/>
-                    <a:lstStyle/>
-                    <a:p>
-                      <a:pPr algn="ctr">
-                        <a:lnSpc>
-                          <a:spcPct val="100000"/>
-                        </a:lnSpc>
-                        <a:spcBef>
-                          <a:spcPts val="0"/>
-                        </a:spcBef>
-                        <a:spcAft>
-                          <a:spcPts val="0"/>
-                        </a:spcAft>
-                      </a:pPr>
-                      <a:r>
-                        <a:rPr sz="500" b="0">
-                          <a:solidFill>
-                            <a:srgbClr val="962837"/>
-                          </a:solidFill>
-                          <a:latin typeface="Calibri"/>
-                        </a:rPr>
-                        <a:t>КЦ</a:t>
-                      </a:r>
-                    </a:p>
-                  </a:txBody>
-                  <a:tcPr anchor="ctr" marL="25400" marR="25400" marT="12700" marB="12700">
-                    <a:solidFill>
-                      <a:srgbClr val="FFD2D8"/>
                     </a:solidFill>
                     <a:lnL w="6350" cap="flat" cmpd="sng" algn="ctr">
                       <a:solidFill>
@@ -13401,6 +13377,112 @@
                     <a:bodyPr wrap="square"/>
                     <a:lstStyle/>
                     <a:p>
+                      <a:pPr algn="ctr">
+                        <a:lnSpc>
+                          <a:spcPct val="100000"/>
+                        </a:lnSpc>
+                        <a:spcBef>
+                          <a:spcPts val="0"/>
+                        </a:spcBef>
+                        <a:spcAft>
+                          <a:spcPts val="0"/>
+                        </a:spcAft>
+                      </a:pPr>
+                      <a:r>
+                        <a:rPr sz="500" b="0">
+                          <a:solidFill>
+                            <a:srgbClr val="962837"/>
+                          </a:solidFill>
+                          <a:latin typeface="Calibri"/>
+                        </a:rPr>
+                        <a:t>БЦ Тюмень</a:t>
+                      </a:r>
+                    </a:p>
+                  </a:txBody>
+                  <a:tcPr anchor="ctr" marL="25400" marR="25400" marT="12700" marB="12700">
+                    <a:solidFill>
+                      <a:srgbClr val="FFD2D8"/>
+                    </a:solidFill>
+                    <a:lnL w="6350" cap="flat" cmpd="sng" algn="ctr">
+                      <a:solidFill>
+                        <a:srgbClr val="E8C4C8"/>
+                      </a:solidFill>
+                    </a:lnL>
+                    <a:lnR w="6350" cap="flat" cmpd="sng" algn="ctr">
+                      <a:solidFill>
+                        <a:srgbClr val="E8C4C8"/>
+                      </a:solidFill>
+                    </a:lnR>
+                    <a:lnT w="6350" cap="flat" cmpd="sng" algn="ctr">
+                      <a:solidFill>
+                        <a:srgbClr val="E8C4C8"/>
+                      </a:solidFill>
+                    </a:lnT>
+                    <a:lnB w="6350" cap="flat" cmpd="sng" algn="ctr">
+                      <a:solidFill>
+                        <a:srgbClr val="E8C4C8"/>
+                      </a:solidFill>
+                    </a:lnB>
+                  </a:tcPr>
+                </a:tc>
+                <a:tc>
+                  <a:txBody>
+                    <a:bodyPr wrap="square"/>
+                    <a:lstStyle/>
+                    <a:p>
+                      <a:pPr algn="ctr">
+                        <a:lnSpc>
+                          <a:spcPct val="100000"/>
+                        </a:lnSpc>
+                        <a:spcBef>
+                          <a:spcPts val="0"/>
+                        </a:spcBef>
+                        <a:spcAft>
+                          <a:spcPts val="0"/>
+                        </a:spcAft>
+                      </a:pPr>
+                      <a:r>
+                        <a:rPr sz="500" b="0">
+                          <a:solidFill>
+                            <a:srgbClr val="962837"/>
+                          </a:solidFill>
+                          <a:latin typeface="Calibri"/>
+                        </a:rPr>
+                        <a:t>БЦ Москва МСП</a:t>
+                      </a:r>
+                    </a:p>
+                  </a:txBody>
+                  <a:tcPr anchor="ctr" marL="25400" marR="25400" marT="12700" marB="12700">
+                    <a:solidFill>
+                      <a:srgbClr val="FFD2D8"/>
+                    </a:solidFill>
+                    <a:lnL w="6350" cap="flat" cmpd="sng" algn="ctr">
+                      <a:solidFill>
+                        <a:srgbClr val="E8C4C8"/>
+                      </a:solidFill>
+                    </a:lnL>
+                    <a:lnR w="6350" cap="flat" cmpd="sng" algn="ctr">
+                      <a:solidFill>
+                        <a:srgbClr val="E8C4C8"/>
+                      </a:solidFill>
+                    </a:lnR>
+                    <a:lnT w="6350" cap="flat" cmpd="sng" algn="ctr">
+                      <a:solidFill>
+                        <a:srgbClr val="E8C4C8"/>
+                      </a:solidFill>
+                    </a:lnT>
+                    <a:lnB w="6350" cap="flat" cmpd="sng" algn="ctr">
+                      <a:solidFill>
+                        <a:srgbClr val="E8C4C8"/>
+                      </a:solidFill>
+                    </a:lnB>
+                  </a:tcPr>
+                </a:tc>
+                <a:tc>
+                  <a:txBody>
+                    <a:bodyPr wrap="square"/>
+                    <a:lstStyle/>
+                    <a:p>
                       <a:pPr algn="l">
                         <a:lnSpc>
                           <a:spcPct val="100000"/>
@@ -13426,112 +13508,6 @@
                   <a:tcPr anchor="ctr" marL="25400" marR="25400" marT="12700" marB="12700">
                     <a:solidFill>
                       <a:srgbClr val="FCF8F9"/>
-                    </a:solidFill>
-                    <a:lnL w="6350" cap="flat" cmpd="sng" algn="ctr">
-                      <a:solidFill>
-                        <a:srgbClr val="E8C4C8"/>
-                      </a:solidFill>
-                    </a:lnL>
-                    <a:lnR w="6350" cap="flat" cmpd="sng" algn="ctr">
-                      <a:solidFill>
-                        <a:srgbClr val="E8C4C8"/>
-                      </a:solidFill>
-                    </a:lnR>
-                    <a:lnT w="6350" cap="flat" cmpd="sng" algn="ctr">
-                      <a:solidFill>
-                        <a:srgbClr val="E8C4C8"/>
-                      </a:solidFill>
-                    </a:lnT>
-                    <a:lnB w="6350" cap="flat" cmpd="sng" algn="ctr">
-                      <a:solidFill>
-                        <a:srgbClr val="E8C4C8"/>
-                      </a:solidFill>
-                    </a:lnB>
-                  </a:tcPr>
-                </a:tc>
-                <a:tc>
-                  <a:txBody>
-                    <a:bodyPr wrap="square"/>
-                    <a:lstStyle/>
-                    <a:p>
-                      <a:pPr algn="ctr">
-                        <a:lnSpc>
-                          <a:spcPct val="100000"/>
-                        </a:lnSpc>
-                        <a:spcBef>
-                          <a:spcPts val="0"/>
-                        </a:spcBef>
-                        <a:spcAft>
-                          <a:spcPts val="0"/>
-                        </a:spcAft>
-                      </a:pPr>
-                      <a:r>
-                        <a:rPr sz="500" b="0">
-                          <a:solidFill>
-                            <a:srgbClr val="962837"/>
-                          </a:solidFill>
-                          <a:latin typeface="Calibri"/>
-                        </a:rPr>
-                        <a:t>БЦ Тюмень</a:t>
-                      </a:r>
-                    </a:p>
-                  </a:txBody>
-                  <a:tcPr anchor="ctr" marL="25400" marR="25400" marT="12700" marB="12700">
-                    <a:solidFill>
-                      <a:srgbClr val="FFD2D8"/>
-                    </a:solidFill>
-                    <a:lnL w="6350" cap="flat" cmpd="sng" algn="ctr">
-                      <a:solidFill>
-                        <a:srgbClr val="E8C4C8"/>
-                      </a:solidFill>
-                    </a:lnL>
-                    <a:lnR w="6350" cap="flat" cmpd="sng" algn="ctr">
-                      <a:solidFill>
-                        <a:srgbClr val="E8C4C8"/>
-                      </a:solidFill>
-                    </a:lnR>
-                    <a:lnT w="6350" cap="flat" cmpd="sng" algn="ctr">
-                      <a:solidFill>
-                        <a:srgbClr val="E8C4C8"/>
-                      </a:solidFill>
-                    </a:lnT>
-                    <a:lnB w="6350" cap="flat" cmpd="sng" algn="ctr">
-                      <a:solidFill>
-                        <a:srgbClr val="E8C4C8"/>
-                      </a:solidFill>
-                    </a:lnB>
-                  </a:tcPr>
-                </a:tc>
-                <a:tc>
-                  <a:txBody>
-                    <a:bodyPr wrap="square"/>
-                    <a:lstStyle/>
-                    <a:p>
-                      <a:pPr algn="ctr">
-                        <a:lnSpc>
-                          <a:spcPct val="100000"/>
-                        </a:lnSpc>
-                        <a:spcBef>
-                          <a:spcPts val="0"/>
-                        </a:spcBef>
-                        <a:spcAft>
-                          <a:spcPts val="0"/>
-                        </a:spcAft>
-                      </a:pPr>
-                      <a:r>
-                        <a:rPr sz="500" b="0">
-                          <a:solidFill>
-                            <a:srgbClr val="962837"/>
-                          </a:solidFill>
-                          <a:latin typeface="Calibri"/>
-                        </a:rPr>
-                        <a:t>БЦ Москва МСП</a:t>
-                      </a:r>
-                    </a:p>
-                  </a:txBody>
-                  <a:tcPr anchor="ctr" marL="25400" marR="25400" marT="12700" marB="12700">
-                    <a:solidFill>
-                      <a:srgbClr val="FFD2D8"/>
                     </a:solidFill>
                     <a:lnL w="6350" cap="flat" cmpd="sng" algn="ctr">
                       <a:solidFill>
@@ -14305,6 +14281,112 @@
                     <a:bodyPr wrap="square"/>
                     <a:lstStyle/>
                     <a:p>
+                      <a:pPr algn="ctr">
+                        <a:lnSpc>
+                          <a:spcPct val="100000"/>
+                        </a:lnSpc>
+                        <a:spcBef>
+                          <a:spcPts val="0"/>
+                        </a:spcBef>
+                        <a:spcAft>
+                          <a:spcPts val="0"/>
+                        </a:spcAft>
+                      </a:pPr>
+                      <a:r>
+                        <a:rPr sz="500" b="0">
+                          <a:solidFill>
+                            <a:srgbClr val="962837"/>
+                          </a:solidFill>
+                          <a:latin typeface="Calibri"/>
+                        </a:rPr>
+                        <a:t>РС Тюмень</a:t>
+                      </a:r>
+                    </a:p>
+                  </a:txBody>
+                  <a:tcPr anchor="ctr" marL="25400" marR="25400" marT="12700" marB="12700">
+                    <a:solidFill>
+                      <a:srgbClr val="FFD2D8"/>
+                    </a:solidFill>
+                    <a:lnL w="6350" cap="flat" cmpd="sng" algn="ctr">
+                      <a:solidFill>
+                        <a:srgbClr val="E8C4C8"/>
+                      </a:solidFill>
+                    </a:lnL>
+                    <a:lnR w="6350" cap="flat" cmpd="sng" algn="ctr">
+                      <a:solidFill>
+                        <a:srgbClr val="E8C4C8"/>
+                      </a:solidFill>
+                    </a:lnR>
+                    <a:lnT w="6350" cap="flat" cmpd="sng" algn="ctr">
+                      <a:solidFill>
+                        <a:srgbClr val="E8C4C8"/>
+                      </a:solidFill>
+                    </a:lnT>
+                    <a:lnB w="6350" cap="flat" cmpd="sng" algn="ctr">
+                      <a:solidFill>
+                        <a:srgbClr val="E8C4C8"/>
+                      </a:solidFill>
+                    </a:lnB>
+                  </a:tcPr>
+                </a:tc>
+                <a:tc>
+                  <a:txBody>
+                    <a:bodyPr wrap="square"/>
+                    <a:lstStyle/>
+                    <a:p>
+                      <a:pPr algn="ctr">
+                        <a:lnSpc>
+                          <a:spcPct val="100000"/>
+                        </a:lnSpc>
+                        <a:spcBef>
+                          <a:spcPts val="0"/>
+                        </a:spcBef>
+                        <a:spcAft>
+                          <a:spcPts val="0"/>
+                        </a:spcAft>
+                      </a:pPr>
+                      <a:r>
+                        <a:rPr sz="500" b="0">
+                          <a:solidFill>
+                            <a:srgbClr val="962837"/>
+                          </a:solidFill>
+                          <a:latin typeface="Calibri"/>
+                        </a:rPr>
+                        <a:t>РС Липецк</a:t>
+                      </a:r>
+                    </a:p>
+                  </a:txBody>
+                  <a:tcPr anchor="ctr" marL="25400" marR="25400" marT="12700" marB="12700">
+                    <a:solidFill>
+                      <a:srgbClr val="FFD2D8"/>
+                    </a:solidFill>
+                    <a:lnL w="6350" cap="flat" cmpd="sng" algn="ctr">
+                      <a:solidFill>
+                        <a:srgbClr val="E8C4C8"/>
+                      </a:solidFill>
+                    </a:lnL>
+                    <a:lnR w="6350" cap="flat" cmpd="sng" algn="ctr">
+                      <a:solidFill>
+                        <a:srgbClr val="E8C4C8"/>
+                      </a:solidFill>
+                    </a:lnR>
+                    <a:lnT w="6350" cap="flat" cmpd="sng" algn="ctr">
+                      <a:solidFill>
+                        <a:srgbClr val="E8C4C8"/>
+                      </a:solidFill>
+                    </a:lnT>
+                    <a:lnB w="6350" cap="flat" cmpd="sng" algn="ctr">
+                      <a:solidFill>
+                        <a:srgbClr val="E8C4C8"/>
+                      </a:solidFill>
+                    </a:lnB>
+                  </a:tcPr>
+                </a:tc>
+                <a:tc>
+                  <a:txBody>
+                    <a:bodyPr wrap="square"/>
+                    <a:lstStyle/>
+                    <a:p>
                       <a:pPr algn="l">
                         <a:lnSpc>
                           <a:spcPct val="100000"/>
@@ -14330,112 +14412,6 @@
                   <a:tcPr anchor="ctr" marL="25400" marR="25400" marT="12700" marB="12700">
                     <a:solidFill>
                       <a:srgbClr val="FFFFFF"/>
-                    </a:solidFill>
-                    <a:lnL w="6350" cap="flat" cmpd="sng" algn="ctr">
-                      <a:solidFill>
-                        <a:srgbClr val="E8C4C8"/>
-                      </a:solidFill>
-                    </a:lnL>
-                    <a:lnR w="6350" cap="flat" cmpd="sng" algn="ctr">
-                      <a:solidFill>
-                        <a:srgbClr val="E8C4C8"/>
-                      </a:solidFill>
-                    </a:lnR>
-                    <a:lnT w="6350" cap="flat" cmpd="sng" algn="ctr">
-                      <a:solidFill>
-                        <a:srgbClr val="E8C4C8"/>
-                      </a:solidFill>
-                    </a:lnT>
-                    <a:lnB w="6350" cap="flat" cmpd="sng" algn="ctr">
-                      <a:solidFill>
-                        <a:srgbClr val="E8C4C8"/>
-                      </a:solidFill>
-                    </a:lnB>
-                  </a:tcPr>
-                </a:tc>
-                <a:tc>
-                  <a:txBody>
-                    <a:bodyPr wrap="square"/>
-                    <a:lstStyle/>
-                    <a:p>
-                      <a:pPr algn="ctr">
-                        <a:lnSpc>
-                          <a:spcPct val="100000"/>
-                        </a:lnSpc>
-                        <a:spcBef>
-                          <a:spcPts val="0"/>
-                        </a:spcBef>
-                        <a:spcAft>
-                          <a:spcPts val="0"/>
-                        </a:spcAft>
-                      </a:pPr>
-                      <a:r>
-                        <a:rPr sz="500" b="0">
-                          <a:solidFill>
-                            <a:srgbClr val="962837"/>
-                          </a:solidFill>
-                          <a:latin typeface="Calibri"/>
-                        </a:rPr>
-                        <a:t>РС Тюмень</a:t>
-                      </a:r>
-                    </a:p>
-                  </a:txBody>
-                  <a:tcPr anchor="ctr" marL="25400" marR="25400" marT="12700" marB="12700">
-                    <a:solidFill>
-                      <a:srgbClr val="FFD2D8"/>
-                    </a:solidFill>
-                    <a:lnL w="6350" cap="flat" cmpd="sng" algn="ctr">
-                      <a:solidFill>
-                        <a:srgbClr val="E8C4C8"/>
-                      </a:solidFill>
-                    </a:lnL>
-                    <a:lnR w="6350" cap="flat" cmpd="sng" algn="ctr">
-                      <a:solidFill>
-                        <a:srgbClr val="E8C4C8"/>
-                      </a:solidFill>
-                    </a:lnR>
-                    <a:lnT w="6350" cap="flat" cmpd="sng" algn="ctr">
-                      <a:solidFill>
-                        <a:srgbClr val="E8C4C8"/>
-                      </a:solidFill>
-                    </a:lnT>
-                    <a:lnB w="6350" cap="flat" cmpd="sng" algn="ctr">
-                      <a:solidFill>
-                        <a:srgbClr val="E8C4C8"/>
-                      </a:solidFill>
-                    </a:lnB>
-                  </a:tcPr>
-                </a:tc>
-                <a:tc>
-                  <a:txBody>
-                    <a:bodyPr wrap="square"/>
-                    <a:lstStyle/>
-                    <a:p>
-                      <a:pPr algn="ctr">
-                        <a:lnSpc>
-                          <a:spcPct val="100000"/>
-                        </a:lnSpc>
-                        <a:spcBef>
-                          <a:spcPts val="0"/>
-                        </a:spcBef>
-                        <a:spcAft>
-                          <a:spcPts val="0"/>
-                        </a:spcAft>
-                      </a:pPr>
-                      <a:r>
-                        <a:rPr sz="500" b="0">
-                          <a:solidFill>
-                            <a:srgbClr val="962837"/>
-                          </a:solidFill>
-                          <a:latin typeface="Calibri"/>
-                        </a:rPr>
-                        <a:t>РС Липецк</a:t>
-                      </a:r>
-                    </a:p>
-                  </a:txBody>
-                  <a:tcPr anchor="ctr" marL="25400" marR="25400" marT="12700" marB="12700">
-                    <a:solidFill>
-                      <a:srgbClr val="FFD2D8"/>
                     </a:solidFill>
                     <a:lnL w="6350" cap="flat" cmpd="sng" algn="ctr">
                       <a:solidFill>
@@ -16270,6 +16246,59 @@
                     <a:bodyPr wrap="square"/>
                     <a:lstStyle/>
                     <a:p>
+                      <a:pPr algn="ctr">
+                        <a:lnSpc>
+                          <a:spcPct val="100000"/>
+                        </a:lnSpc>
+                        <a:spcBef>
+                          <a:spcPts val="0"/>
+                        </a:spcBef>
+                        <a:spcAft>
+                          <a:spcPts val="0"/>
+                        </a:spcAft>
+                      </a:pPr>
+                      <a:r>
+                        <a:rPr sz="500" b="0">
+                          <a:solidFill>
+                            <a:srgbClr val="962837"/>
+                          </a:solidFill>
+                          <a:latin typeface="Calibri"/>
+                        </a:rPr>
+                        <a:t>КЦ</a:t>
+                      </a:r>
+                    </a:p>
+                  </a:txBody>
+                  <a:tcPr anchor="ctr" marL="25400" marR="25400" marT="12700" marB="12700">
+                    <a:solidFill>
+                      <a:srgbClr val="FFD2D8"/>
+                    </a:solidFill>
+                    <a:lnL w="6350" cap="flat" cmpd="sng" algn="ctr">
+                      <a:solidFill>
+                        <a:srgbClr val="E8C4C8"/>
+                      </a:solidFill>
+                    </a:lnL>
+                    <a:lnR w="6350" cap="flat" cmpd="sng" algn="ctr">
+                      <a:solidFill>
+                        <a:srgbClr val="E8C4C8"/>
+                      </a:solidFill>
+                    </a:lnR>
+                    <a:lnT w="6350" cap="flat" cmpd="sng" algn="ctr">
+                      <a:solidFill>
+                        <a:srgbClr val="E8C4C8"/>
+                      </a:solidFill>
+                    </a:lnT>
+                    <a:lnB w="6350" cap="flat" cmpd="sng" algn="ctr">
+                      <a:solidFill>
+                        <a:srgbClr val="E8C4C8"/>
+                      </a:solidFill>
+                    </a:lnB>
+                  </a:tcPr>
+                </a:tc>
+                <a:tc>
+                  <a:txBody>
+                    <a:bodyPr wrap="square"/>
+                    <a:lstStyle/>
+                    <a:p>
                       <a:pPr algn="l">
                         <a:lnSpc>
                           <a:spcPct val="100000"/>
@@ -16295,59 +16324,6 @@
                   <a:tcPr anchor="ctr" marL="25400" marR="25400" marT="12700" marB="12700">
                     <a:solidFill>
                       <a:srgbClr val="FFFFFF"/>
-                    </a:solidFill>
-                    <a:lnL w="6350" cap="flat" cmpd="sng" algn="ctr">
-                      <a:solidFill>
-                        <a:srgbClr val="E8C4C8"/>
-                      </a:solidFill>
-                    </a:lnL>
-                    <a:lnR w="6350" cap="flat" cmpd="sng" algn="ctr">
-                      <a:solidFill>
-                        <a:srgbClr val="E8C4C8"/>
-                      </a:solidFill>
-                    </a:lnR>
-                    <a:lnT w="6350" cap="flat" cmpd="sng" algn="ctr">
-                      <a:solidFill>
-                        <a:srgbClr val="E8C4C8"/>
-                      </a:solidFill>
-                    </a:lnT>
-                    <a:lnB w="6350" cap="flat" cmpd="sng" algn="ctr">
-                      <a:solidFill>
-                        <a:srgbClr val="E8C4C8"/>
-                      </a:solidFill>
-                    </a:lnB>
-                  </a:tcPr>
-                </a:tc>
-                <a:tc>
-                  <a:txBody>
-                    <a:bodyPr wrap="square"/>
-                    <a:lstStyle/>
-                    <a:p>
-                      <a:pPr algn="ctr">
-                        <a:lnSpc>
-                          <a:spcPct val="100000"/>
-                        </a:lnSpc>
-                        <a:spcBef>
-                          <a:spcPts val="0"/>
-                        </a:spcBef>
-                        <a:spcAft>
-                          <a:spcPts val="0"/>
-                        </a:spcAft>
-                      </a:pPr>
-                      <a:r>
-                        <a:rPr sz="500" b="0">
-                          <a:solidFill>
-                            <a:srgbClr val="962837"/>
-                          </a:solidFill>
-                          <a:latin typeface="Calibri"/>
-                        </a:rPr>
-                        <a:t>КЦ</a:t>
-                      </a:r>
-                    </a:p>
-                  </a:txBody>
-                  <a:tcPr anchor="ctr" marL="25400" marR="25400" marT="12700" marB="12700">
-                    <a:solidFill>
-                      <a:srgbClr val="FFD2D8"/>
                     </a:solidFill>
                     <a:lnL w="6350" cap="flat" cmpd="sng" algn="ctr">
                       <a:solidFill>
@@ -22406,59 +22382,6 @@
                   <a:tcPr anchor="ctr" marL="25400" marR="25400" marT="12700" marB="12700">
                     <a:solidFill>
                       <a:srgbClr val="FFD2D8"/>
-                    </a:solidFill>
-                    <a:lnL w="6350" cap="flat" cmpd="sng" algn="ctr">
-                      <a:solidFill>
-                        <a:srgbClr val="E8C4C8"/>
-                      </a:solidFill>
-                    </a:lnL>
-                    <a:lnR w="6350" cap="flat" cmpd="sng" algn="ctr">
-                      <a:solidFill>
-                        <a:srgbClr val="E8C4C8"/>
-                      </a:solidFill>
-                    </a:lnR>
-                    <a:lnT w="6350" cap="flat" cmpd="sng" algn="ctr">
-                      <a:solidFill>
-                        <a:srgbClr val="E8C4C8"/>
-                      </a:solidFill>
-                    </a:lnT>
-                    <a:lnB w="6350" cap="flat" cmpd="sng" algn="ctr">
-                      <a:solidFill>
-                        <a:srgbClr val="E8C4C8"/>
-                      </a:solidFill>
-                    </a:lnB>
-                  </a:tcPr>
-                </a:tc>
-                <a:tc>
-                  <a:txBody>
-                    <a:bodyPr wrap="square"/>
-                    <a:lstStyle/>
-                    <a:p>
-                      <a:pPr algn="l">
-                        <a:lnSpc>
-                          <a:spcPct val="100000"/>
-                        </a:lnSpc>
-                        <a:spcBef>
-                          <a:spcPts val="0"/>
-                        </a:spcBef>
-                        <a:spcAft>
-                          <a:spcPts val="0"/>
-                        </a:spcAft>
-                      </a:pPr>
-                      <a:r>
-                        <a:rPr sz="500" b="0">
-                          <a:solidFill>
-                            <a:srgbClr val="323232"/>
-                          </a:solidFill>
-                          <a:latin typeface="Calibri"/>
-                        </a:rPr>
-                        <a:t/>
-                      </a:r>
-                    </a:p>
-                  </a:txBody>
-                  <a:tcPr anchor="ctr" marL="25400" marR="25400" marT="12700" marB="12700">
-                    <a:solidFill>
-                      <a:srgbClr val="FCF8F9"/>
                     </a:solidFill>
                     <a:lnL w="6350" cap="flat" cmpd="sng" algn="ctr">
                       <a:solidFill>
@@ -22751,6 +22674,59 @@
                     </a:lnB>
                   </a:tcPr>
                 </a:tc>
+                <a:tc>
+                  <a:txBody>
+                    <a:bodyPr wrap="square"/>
+                    <a:lstStyle/>
+                    <a:p>
+                      <a:pPr algn="l">
+                        <a:lnSpc>
+                          <a:spcPct val="100000"/>
+                        </a:lnSpc>
+                        <a:spcBef>
+                          <a:spcPts val="0"/>
+                        </a:spcBef>
+                        <a:spcAft>
+                          <a:spcPts val="0"/>
+                        </a:spcAft>
+                      </a:pPr>
+                      <a:r>
+                        <a:rPr sz="500" b="0">
+                          <a:solidFill>
+                            <a:srgbClr val="323232"/>
+                          </a:solidFill>
+                          <a:latin typeface="Calibri"/>
+                        </a:rPr>
+                        <a:t/>
+                      </a:r>
+                    </a:p>
+                  </a:txBody>
+                  <a:tcPr anchor="ctr" marL="25400" marR="25400" marT="12700" marB="12700">
+                    <a:solidFill>
+                      <a:srgbClr val="FCF8F9"/>
+                    </a:solidFill>
+                    <a:lnL w="6350" cap="flat" cmpd="sng" algn="ctr">
+                      <a:solidFill>
+                        <a:srgbClr val="E8C4C8"/>
+                      </a:solidFill>
+                    </a:lnL>
+                    <a:lnR w="6350" cap="flat" cmpd="sng" algn="ctr">
+                      <a:solidFill>
+                        <a:srgbClr val="E8C4C8"/>
+                      </a:solidFill>
+                    </a:lnR>
+                    <a:lnT w="6350" cap="flat" cmpd="sng" algn="ctr">
+                      <a:solidFill>
+                        <a:srgbClr val="E8C4C8"/>
+                      </a:solidFill>
+                    </a:lnT>
+                    <a:lnB w="6350" cap="flat" cmpd="sng" algn="ctr">
+                      <a:solidFill>
+                        <a:srgbClr val="E8C4C8"/>
+                      </a:solidFill>
+                    </a:lnB>
+                  </a:tcPr>
+                </a:tc>
               </a:tr>
               <a:tr h="256032">
                 <a:tc>
@@ -25359,6 +25335,59 @@
                     <a:bodyPr wrap="square"/>
                     <a:lstStyle/>
                     <a:p>
+                      <a:pPr algn="ctr">
+                        <a:lnSpc>
+                          <a:spcPct val="100000"/>
+                        </a:lnSpc>
+                        <a:spcBef>
+                          <a:spcPts val="0"/>
+                        </a:spcBef>
+                        <a:spcAft>
+                          <a:spcPts val="0"/>
+                        </a:spcAft>
+                      </a:pPr>
+                      <a:r>
+                        <a:rPr sz="500" b="0">
+                          <a:solidFill>
+                            <a:srgbClr val="962837"/>
+                          </a:solidFill>
+                          <a:latin typeface="Calibri"/>
+                        </a:rPr>
+                        <a:t>КЦ</a:t>
+                      </a:r>
+                    </a:p>
+                  </a:txBody>
+                  <a:tcPr anchor="ctr" marL="25400" marR="25400" marT="12700" marB="12700">
+                    <a:solidFill>
+                      <a:srgbClr val="FFD2D8"/>
+                    </a:solidFill>
+                    <a:lnL w="6350" cap="flat" cmpd="sng" algn="ctr">
+                      <a:solidFill>
+                        <a:srgbClr val="E8C4C8"/>
+                      </a:solidFill>
+                    </a:lnL>
+                    <a:lnR w="6350" cap="flat" cmpd="sng" algn="ctr">
+                      <a:solidFill>
+                        <a:srgbClr val="E8C4C8"/>
+                      </a:solidFill>
+                    </a:lnR>
+                    <a:lnT w="6350" cap="flat" cmpd="sng" algn="ctr">
+                      <a:solidFill>
+                        <a:srgbClr val="E8C4C8"/>
+                      </a:solidFill>
+                    </a:lnT>
+                    <a:lnB w="6350" cap="flat" cmpd="sng" algn="ctr">
+                      <a:solidFill>
+                        <a:srgbClr val="E8C4C8"/>
+                      </a:solidFill>
+                    </a:lnB>
+                  </a:tcPr>
+                </a:tc>
+                <a:tc>
+                  <a:txBody>
+                    <a:bodyPr wrap="square"/>
+                    <a:lstStyle/>
+                    <a:p>
                       <a:pPr algn="l">
                         <a:lnSpc>
                           <a:spcPct val="100000"/>
@@ -25384,59 +25413,6 @@
                   <a:tcPr anchor="ctr" marL="25400" marR="25400" marT="12700" marB="12700">
                     <a:solidFill>
                       <a:srgbClr val="FFFFFF"/>
-                    </a:solidFill>
-                    <a:lnL w="6350" cap="flat" cmpd="sng" algn="ctr">
-                      <a:solidFill>
-                        <a:srgbClr val="E8C4C8"/>
-                      </a:solidFill>
-                    </a:lnL>
-                    <a:lnR w="6350" cap="flat" cmpd="sng" algn="ctr">
-                      <a:solidFill>
-                        <a:srgbClr val="E8C4C8"/>
-                      </a:solidFill>
-                    </a:lnR>
-                    <a:lnT w="6350" cap="flat" cmpd="sng" algn="ctr">
-                      <a:solidFill>
-                        <a:srgbClr val="E8C4C8"/>
-                      </a:solidFill>
-                    </a:lnT>
-                    <a:lnB w="6350" cap="flat" cmpd="sng" algn="ctr">
-                      <a:solidFill>
-                        <a:srgbClr val="E8C4C8"/>
-                      </a:solidFill>
-                    </a:lnB>
-                  </a:tcPr>
-                </a:tc>
-                <a:tc>
-                  <a:txBody>
-                    <a:bodyPr wrap="square"/>
-                    <a:lstStyle/>
-                    <a:p>
-                      <a:pPr algn="ctr">
-                        <a:lnSpc>
-                          <a:spcPct val="100000"/>
-                        </a:lnSpc>
-                        <a:spcBef>
-                          <a:spcPts val="0"/>
-                        </a:spcBef>
-                        <a:spcAft>
-                          <a:spcPts val="0"/>
-                        </a:spcAft>
-                      </a:pPr>
-                      <a:r>
-                        <a:rPr sz="500" b="0">
-                          <a:solidFill>
-                            <a:srgbClr val="962837"/>
-                          </a:solidFill>
-                          <a:latin typeface="Calibri"/>
-                        </a:rPr>
-                        <a:t>КЦ</a:t>
-                      </a:r>
-                    </a:p>
-                  </a:txBody>
-                  <a:tcPr anchor="ctr" marL="25400" marR="25400" marT="12700" marB="12700">
-                    <a:solidFill>
-                      <a:srgbClr val="FFD2D8"/>
                     </a:solidFill>
                     <a:lnL w="6350" cap="flat" cmpd="sng" algn="ctr">
                       <a:solidFill>
@@ -26787,7 +26763,7 @@
                     </a:lnB>
                   </a:tcPr>
                 </a:tc>
-                <a:tc gridSpan="3">
+                <a:tc gridSpan="8">
                   <a:txBody>
                     <a:bodyPr wrap="square"/>
                     <a:lstStyle/>
@@ -26898,6 +26874,151 @@
                     </a:lnB>
                   </a:tcPr>
                 </a:tc>
+                <a:tc hMerge="1">
+                  <a:txBody>
+                    <a:bodyPr/>
+                    <a:lstStyle/>
+                    <a:p/>
+                  </a:txBody>
+                  <a:tcPr>
+                    <a:lnL w="6350" cap="flat" cmpd="sng" algn="ctr">
+                      <a:solidFill>
+                        <a:srgbClr val="E8C4C8"/>
+                      </a:solidFill>
+                    </a:lnL>
+                    <a:lnR w="6350" cap="flat" cmpd="sng" algn="ctr">
+                      <a:solidFill>
+                        <a:srgbClr val="E8C4C8"/>
+                      </a:solidFill>
+                    </a:lnR>
+                    <a:lnT w="6350" cap="flat" cmpd="sng" algn="ctr">
+                      <a:solidFill>
+                        <a:srgbClr val="E8C4C8"/>
+                      </a:solidFill>
+                    </a:lnT>
+                    <a:lnB w="6350" cap="flat" cmpd="sng" algn="ctr">
+                      <a:solidFill>
+                        <a:srgbClr val="E8C4C8"/>
+                      </a:solidFill>
+                    </a:lnB>
+                  </a:tcPr>
+                </a:tc>
+                <a:tc hMerge="1">
+                  <a:txBody>
+                    <a:bodyPr/>
+                    <a:lstStyle/>
+                    <a:p/>
+                  </a:txBody>
+                  <a:tcPr>
+                    <a:lnL w="6350" cap="flat" cmpd="sng" algn="ctr">
+                      <a:solidFill>
+                        <a:srgbClr val="E8C4C8"/>
+                      </a:solidFill>
+                    </a:lnL>
+                    <a:lnR w="6350" cap="flat" cmpd="sng" algn="ctr">
+                      <a:solidFill>
+                        <a:srgbClr val="E8C4C8"/>
+                      </a:solidFill>
+                    </a:lnR>
+                    <a:lnT w="6350" cap="flat" cmpd="sng" algn="ctr">
+                      <a:solidFill>
+                        <a:srgbClr val="E8C4C8"/>
+                      </a:solidFill>
+                    </a:lnT>
+                    <a:lnB w="6350" cap="flat" cmpd="sng" algn="ctr">
+                      <a:solidFill>
+                        <a:srgbClr val="E8C4C8"/>
+                      </a:solidFill>
+                    </a:lnB>
+                  </a:tcPr>
+                </a:tc>
+                <a:tc hMerge="1">
+                  <a:txBody>
+                    <a:bodyPr/>
+                    <a:lstStyle/>
+                    <a:p/>
+                  </a:txBody>
+                  <a:tcPr>
+                    <a:lnL w="6350" cap="flat" cmpd="sng" algn="ctr">
+                      <a:solidFill>
+                        <a:srgbClr val="E8C4C8"/>
+                      </a:solidFill>
+                    </a:lnL>
+                    <a:lnR w="6350" cap="flat" cmpd="sng" algn="ctr">
+                      <a:solidFill>
+                        <a:srgbClr val="E8C4C8"/>
+                      </a:solidFill>
+                    </a:lnR>
+                    <a:lnT w="6350" cap="flat" cmpd="sng" algn="ctr">
+                      <a:solidFill>
+                        <a:srgbClr val="E8C4C8"/>
+                      </a:solidFill>
+                    </a:lnT>
+                    <a:lnB w="6350" cap="flat" cmpd="sng" algn="ctr">
+                      <a:solidFill>
+                        <a:srgbClr val="E8C4C8"/>
+                      </a:solidFill>
+                    </a:lnB>
+                  </a:tcPr>
+                </a:tc>
+                <a:tc hMerge="1">
+                  <a:txBody>
+                    <a:bodyPr/>
+                    <a:lstStyle/>
+                    <a:p/>
+                  </a:txBody>
+                  <a:tcPr>
+                    <a:lnL w="6350" cap="flat" cmpd="sng" algn="ctr">
+                      <a:solidFill>
+                        <a:srgbClr val="E8C4C8"/>
+                      </a:solidFill>
+                    </a:lnL>
+                    <a:lnR w="6350" cap="flat" cmpd="sng" algn="ctr">
+                      <a:solidFill>
+                        <a:srgbClr val="E8C4C8"/>
+                      </a:solidFill>
+                    </a:lnR>
+                    <a:lnT w="6350" cap="flat" cmpd="sng" algn="ctr">
+                      <a:solidFill>
+                        <a:srgbClr val="E8C4C8"/>
+                      </a:solidFill>
+                    </a:lnT>
+                    <a:lnB w="6350" cap="flat" cmpd="sng" algn="ctr">
+                      <a:solidFill>
+                        <a:srgbClr val="E8C4C8"/>
+                      </a:solidFill>
+                    </a:lnB>
+                  </a:tcPr>
+                </a:tc>
+                <a:tc hMerge="1">
+                  <a:txBody>
+                    <a:bodyPr/>
+                    <a:lstStyle/>
+                    <a:p/>
+                  </a:txBody>
+                  <a:tcPr>
+                    <a:lnL w="6350" cap="flat" cmpd="sng" algn="ctr">
+                      <a:solidFill>
+                        <a:srgbClr val="E8C4C8"/>
+                      </a:solidFill>
+                    </a:lnL>
+                    <a:lnR w="6350" cap="flat" cmpd="sng" algn="ctr">
+                      <a:solidFill>
+                        <a:srgbClr val="E8C4C8"/>
+                      </a:solidFill>
+                    </a:lnR>
+                    <a:lnT w="6350" cap="flat" cmpd="sng" algn="ctr">
+                      <a:solidFill>
+                        <a:srgbClr val="E8C4C8"/>
+                      </a:solidFill>
+                    </a:lnT>
+                    <a:lnB w="6350" cap="flat" cmpd="sng" algn="ctr">
+                      <a:solidFill>
+                        <a:srgbClr val="E8C4C8"/>
+                      </a:solidFill>
+                    </a:lnB>
+                  </a:tcPr>
+                </a:tc>
                 <a:tc>
                   <a:txBody>
                     <a:bodyPr wrap="square"/>
@@ -26929,175 +27050,6 @@
                     <a:solidFill>
                       <a:srgbClr val="570C17"/>
                     </a:solidFill>
-                    <a:lnL w="6350" cap="flat" cmpd="sng" algn="ctr">
-                      <a:solidFill>
-                        <a:srgbClr val="E8C4C8"/>
-                      </a:solidFill>
-                    </a:lnL>
-                    <a:lnR w="6350" cap="flat" cmpd="sng" algn="ctr">
-                      <a:solidFill>
-                        <a:srgbClr val="E8C4C8"/>
-                      </a:solidFill>
-                    </a:lnR>
-                    <a:lnT w="6350" cap="flat" cmpd="sng" algn="ctr">
-                      <a:solidFill>
-                        <a:srgbClr val="E8C4C8"/>
-                      </a:solidFill>
-                    </a:lnT>
-                    <a:lnB w="6350" cap="flat" cmpd="sng" algn="ctr">
-                      <a:solidFill>
-                        <a:srgbClr val="E8C4C8"/>
-                      </a:solidFill>
-                    </a:lnB>
-                  </a:tcPr>
-                </a:tc>
-                <a:tc gridSpan="5">
-                  <a:txBody>
-                    <a:bodyPr wrap="square"/>
-                    <a:lstStyle/>
-                    <a:p>
-                      <a:pPr algn="ctr">
-                        <a:lnSpc>
-                          <a:spcPct val="100000"/>
-                        </a:lnSpc>
-                        <a:spcBef>
-                          <a:spcPts val="0"/>
-                        </a:spcBef>
-                        <a:spcAft>
-                          <a:spcPts val="0"/>
-                        </a:spcAft>
-                      </a:pPr>
-                      <a:r>
-                        <a:rPr sz="700" b="1">
-                          <a:solidFill>
-                            <a:srgbClr val="FFFFFF"/>
-                          </a:solidFill>
-                          <a:latin typeface="Calibri"/>
-                        </a:rPr>
-                        <a:t>2027</a:t>
-                      </a:r>
-                    </a:p>
-                  </a:txBody>
-                  <a:tcPr anchor="ctr" marL="25400" marR="25400" marT="12700" marB="12700">
-                    <a:solidFill>
-                      <a:srgbClr val="570C17"/>
-                    </a:solidFill>
-                    <a:lnL w="6350" cap="flat" cmpd="sng" algn="ctr">
-                      <a:solidFill>
-                        <a:srgbClr val="E8C4C8"/>
-                      </a:solidFill>
-                    </a:lnL>
-                    <a:lnR w="6350" cap="flat" cmpd="sng" algn="ctr">
-                      <a:solidFill>
-                        <a:srgbClr val="E8C4C8"/>
-                      </a:solidFill>
-                    </a:lnR>
-                    <a:lnT w="6350" cap="flat" cmpd="sng" algn="ctr">
-                      <a:solidFill>
-                        <a:srgbClr val="E8C4C8"/>
-                      </a:solidFill>
-                    </a:lnT>
-                    <a:lnB w="6350" cap="flat" cmpd="sng" algn="ctr">
-                      <a:solidFill>
-                        <a:srgbClr val="E8C4C8"/>
-                      </a:solidFill>
-                    </a:lnB>
-                  </a:tcPr>
-                </a:tc>
-                <a:tc hMerge="1">
-                  <a:txBody>
-                    <a:bodyPr/>
-                    <a:lstStyle/>
-                    <a:p/>
-                  </a:txBody>
-                  <a:tcPr>
-                    <a:lnL w="6350" cap="flat" cmpd="sng" algn="ctr">
-                      <a:solidFill>
-                        <a:srgbClr val="E8C4C8"/>
-                      </a:solidFill>
-                    </a:lnL>
-                    <a:lnR w="6350" cap="flat" cmpd="sng" algn="ctr">
-                      <a:solidFill>
-                        <a:srgbClr val="E8C4C8"/>
-                      </a:solidFill>
-                    </a:lnR>
-                    <a:lnT w="6350" cap="flat" cmpd="sng" algn="ctr">
-                      <a:solidFill>
-                        <a:srgbClr val="E8C4C8"/>
-                      </a:solidFill>
-                    </a:lnT>
-                    <a:lnB w="6350" cap="flat" cmpd="sng" algn="ctr">
-                      <a:solidFill>
-                        <a:srgbClr val="E8C4C8"/>
-                      </a:solidFill>
-                    </a:lnB>
-                  </a:tcPr>
-                </a:tc>
-                <a:tc hMerge="1">
-                  <a:txBody>
-                    <a:bodyPr/>
-                    <a:lstStyle/>
-                    <a:p/>
-                  </a:txBody>
-                  <a:tcPr>
-                    <a:lnL w="6350" cap="flat" cmpd="sng" algn="ctr">
-                      <a:solidFill>
-                        <a:srgbClr val="E8C4C8"/>
-                      </a:solidFill>
-                    </a:lnL>
-                    <a:lnR w="6350" cap="flat" cmpd="sng" algn="ctr">
-                      <a:solidFill>
-                        <a:srgbClr val="E8C4C8"/>
-                      </a:solidFill>
-                    </a:lnR>
-                    <a:lnT w="6350" cap="flat" cmpd="sng" algn="ctr">
-                      <a:solidFill>
-                        <a:srgbClr val="E8C4C8"/>
-                      </a:solidFill>
-                    </a:lnT>
-                    <a:lnB w="6350" cap="flat" cmpd="sng" algn="ctr">
-                      <a:solidFill>
-                        <a:srgbClr val="E8C4C8"/>
-                      </a:solidFill>
-                    </a:lnB>
-                  </a:tcPr>
-                </a:tc>
-                <a:tc hMerge="1">
-                  <a:txBody>
-                    <a:bodyPr/>
-                    <a:lstStyle/>
-                    <a:p/>
-                  </a:txBody>
-                  <a:tcPr>
-                    <a:lnL w="6350" cap="flat" cmpd="sng" algn="ctr">
-                      <a:solidFill>
-                        <a:srgbClr val="E8C4C8"/>
-                      </a:solidFill>
-                    </a:lnL>
-                    <a:lnR w="6350" cap="flat" cmpd="sng" algn="ctr">
-                      <a:solidFill>
-                        <a:srgbClr val="E8C4C8"/>
-                      </a:solidFill>
-                    </a:lnR>
-                    <a:lnT w="6350" cap="flat" cmpd="sng" algn="ctr">
-                      <a:solidFill>
-                        <a:srgbClr val="E8C4C8"/>
-                      </a:solidFill>
-                    </a:lnT>
-                    <a:lnB w="6350" cap="flat" cmpd="sng" algn="ctr">
-                      <a:solidFill>
-                        <a:srgbClr val="E8C4C8"/>
-                      </a:solidFill>
-                    </a:lnB>
-                  </a:tcPr>
-                </a:tc>
-                <a:tc hMerge="1">
-                  <a:txBody>
-                    <a:bodyPr/>
-                    <a:lstStyle/>
-                    <a:p/>
-                  </a:txBody>
-                  <a:tcPr>
                     <a:lnL w="6350" cap="flat" cmpd="sng" algn="ctr">
                       <a:solidFill>
                         <a:srgbClr val="E8C4C8"/>
@@ -27680,272 +27632,272 @@
                           </a:solidFill>
                           <a:latin typeface="Calibri"/>
                         </a:rPr>
+                        <a:t>05.27</a:t>
+                      </a:r>
+                    </a:p>
+                  </a:txBody>
+                  <a:tcPr anchor="ctr" marL="25400" marR="25400" marT="12700" marB="12700">
+                    <a:solidFill>
+                      <a:srgbClr val="570C17"/>
+                    </a:solidFill>
+                    <a:lnL w="6350" cap="flat" cmpd="sng" algn="ctr">
+                      <a:solidFill>
+                        <a:srgbClr val="E8C4C8"/>
+                      </a:solidFill>
+                    </a:lnL>
+                    <a:lnR w="6350" cap="flat" cmpd="sng" algn="ctr">
+                      <a:solidFill>
+                        <a:srgbClr val="E8C4C8"/>
+                      </a:solidFill>
+                    </a:lnR>
+                    <a:lnT w="6350" cap="flat" cmpd="sng" algn="ctr">
+                      <a:solidFill>
+                        <a:srgbClr val="E8C4C8"/>
+                      </a:solidFill>
+                    </a:lnT>
+                    <a:lnB w="6350" cap="flat" cmpd="sng" algn="ctr">
+                      <a:solidFill>
+                        <a:srgbClr val="E8C4C8"/>
+                      </a:solidFill>
+                    </a:lnB>
+                  </a:tcPr>
+                </a:tc>
+                <a:tc>
+                  <a:txBody>
+                    <a:bodyPr wrap="square"/>
+                    <a:lstStyle/>
+                    <a:p>
+                      <a:pPr algn="ctr">
+                        <a:lnSpc>
+                          <a:spcPct val="100000"/>
+                        </a:lnSpc>
+                        <a:spcBef>
+                          <a:spcPts val="0"/>
+                        </a:spcBef>
+                        <a:spcAft>
+                          <a:spcPts val="0"/>
+                        </a:spcAft>
+                      </a:pPr>
+                      <a:r>
+                        <a:rPr sz="600" b="1">
+                          <a:solidFill>
+                            <a:srgbClr val="FFFFFF"/>
+                          </a:solidFill>
+                          <a:latin typeface="Calibri"/>
+                        </a:rPr>
+                        <a:t>06.27</a:t>
+                      </a:r>
+                    </a:p>
+                  </a:txBody>
+                  <a:tcPr anchor="ctr" marL="25400" marR="25400" marT="12700" marB="12700">
+                    <a:solidFill>
+                      <a:srgbClr val="570C17"/>
+                    </a:solidFill>
+                    <a:lnL w="6350" cap="flat" cmpd="sng" algn="ctr">
+                      <a:solidFill>
+                        <a:srgbClr val="E8C4C8"/>
+                      </a:solidFill>
+                    </a:lnL>
+                    <a:lnR w="6350" cap="flat" cmpd="sng" algn="ctr">
+                      <a:solidFill>
+                        <a:srgbClr val="E8C4C8"/>
+                      </a:solidFill>
+                    </a:lnR>
+                    <a:lnT w="6350" cap="flat" cmpd="sng" algn="ctr">
+                      <a:solidFill>
+                        <a:srgbClr val="E8C4C8"/>
+                      </a:solidFill>
+                    </a:lnT>
+                    <a:lnB w="6350" cap="flat" cmpd="sng" algn="ctr">
+                      <a:solidFill>
+                        <a:srgbClr val="E8C4C8"/>
+                      </a:solidFill>
+                    </a:lnB>
+                  </a:tcPr>
+                </a:tc>
+                <a:tc>
+                  <a:txBody>
+                    <a:bodyPr wrap="square"/>
+                    <a:lstStyle/>
+                    <a:p>
+                      <a:pPr algn="ctr">
+                        <a:lnSpc>
+                          <a:spcPct val="100000"/>
+                        </a:lnSpc>
+                        <a:spcBef>
+                          <a:spcPts val="0"/>
+                        </a:spcBef>
+                        <a:spcAft>
+                          <a:spcPts val="0"/>
+                        </a:spcAft>
+                      </a:pPr>
+                      <a:r>
+                        <a:rPr sz="600" b="1">
+                          <a:solidFill>
+                            <a:srgbClr val="FFFFFF"/>
+                          </a:solidFill>
+                          <a:latin typeface="Calibri"/>
+                        </a:rPr>
+                        <a:t>07.27</a:t>
+                      </a:r>
+                    </a:p>
+                  </a:txBody>
+                  <a:tcPr anchor="ctr" marL="25400" marR="25400" marT="12700" marB="12700">
+                    <a:solidFill>
+                      <a:srgbClr val="570C17"/>
+                    </a:solidFill>
+                    <a:lnL w="6350" cap="flat" cmpd="sng" algn="ctr">
+                      <a:solidFill>
+                        <a:srgbClr val="E8C4C8"/>
+                      </a:solidFill>
+                    </a:lnL>
+                    <a:lnR w="6350" cap="flat" cmpd="sng" algn="ctr">
+                      <a:solidFill>
+                        <a:srgbClr val="E8C4C8"/>
+                      </a:solidFill>
+                    </a:lnR>
+                    <a:lnT w="6350" cap="flat" cmpd="sng" algn="ctr">
+                      <a:solidFill>
+                        <a:srgbClr val="E8C4C8"/>
+                      </a:solidFill>
+                    </a:lnT>
+                    <a:lnB w="6350" cap="flat" cmpd="sng" algn="ctr">
+                      <a:solidFill>
+                        <a:srgbClr val="E8C4C8"/>
+                      </a:solidFill>
+                    </a:lnB>
+                  </a:tcPr>
+                </a:tc>
+                <a:tc>
+                  <a:txBody>
+                    <a:bodyPr wrap="square"/>
+                    <a:lstStyle/>
+                    <a:p>
+                      <a:pPr algn="ctr">
+                        <a:lnSpc>
+                          <a:spcPct val="100000"/>
+                        </a:lnSpc>
+                        <a:spcBef>
+                          <a:spcPts val="0"/>
+                        </a:spcBef>
+                        <a:spcAft>
+                          <a:spcPts val="0"/>
+                        </a:spcAft>
+                      </a:pPr>
+                      <a:r>
+                        <a:rPr sz="600" b="1">
+                          <a:solidFill>
+                            <a:srgbClr val="FFFFFF"/>
+                          </a:solidFill>
+                          <a:latin typeface="Calibri"/>
+                        </a:rPr>
+                        <a:t>08.27</a:t>
+                      </a:r>
+                    </a:p>
+                  </a:txBody>
+                  <a:tcPr anchor="ctr" marL="25400" marR="25400" marT="12700" marB="12700">
+                    <a:solidFill>
+                      <a:srgbClr val="570C17"/>
+                    </a:solidFill>
+                    <a:lnL w="6350" cap="flat" cmpd="sng" algn="ctr">
+                      <a:solidFill>
+                        <a:srgbClr val="E8C4C8"/>
+                      </a:solidFill>
+                    </a:lnL>
+                    <a:lnR w="6350" cap="flat" cmpd="sng" algn="ctr">
+                      <a:solidFill>
+                        <a:srgbClr val="E8C4C8"/>
+                      </a:solidFill>
+                    </a:lnR>
+                    <a:lnT w="6350" cap="flat" cmpd="sng" algn="ctr">
+                      <a:solidFill>
+                        <a:srgbClr val="E8C4C8"/>
+                      </a:solidFill>
+                    </a:lnT>
+                    <a:lnB w="6350" cap="flat" cmpd="sng" algn="ctr">
+                      <a:solidFill>
+                        <a:srgbClr val="E8C4C8"/>
+                      </a:solidFill>
+                    </a:lnB>
+                  </a:tcPr>
+                </a:tc>
+                <a:tc>
+                  <a:txBody>
+                    <a:bodyPr wrap="square"/>
+                    <a:lstStyle/>
+                    <a:p>
+                      <a:pPr algn="ctr">
+                        <a:lnSpc>
+                          <a:spcPct val="100000"/>
+                        </a:lnSpc>
+                        <a:spcBef>
+                          <a:spcPts val="0"/>
+                        </a:spcBef>
+                        <a:spcAft>
+                          <a:spcPts val="0"/>
+                        </a:spcAft>
+                      </a:pPr>
+                      <a:r>
+                        <a:rPr sz="600" b="1">
+                          <a:solidFill>
+                            <a:srgbClr val="FFFFFF"/>
+                          </a:solidFill>
+                          <a:latin typeface="Calibri"/>
+                        </a:rPr>
+                        <a:t>09.27</a:t>
+                      </a:r>
+                    </a:p>
+                  </a:txBody>
+                  <a:tcPr anchor="ctr" marL="25400" marR="25400" marT="12700" marB="12700">
+                    <a:solidFill>
+                      <a:srgbClr val="570C17"/>
+                    </a:solidFill>
+                    <a:lnL w="6350" cap="flat" cmpd="sng" algn="ctr">
+                      <a:solidFill>
+                        <a:srgbClr val="E8C4C8"/>
+                      </a:solidFill>
+                    </a:lnL>
+                    <a:lnR w="6350" cap="flat" cmpd="sng" algn="ctr">
+                      <a:solidFill>
+                        <a:srgbClr val="E8C4C8"/>
+                      </a:solidFill>
+                    </a:lnR>
+                    <a:lnT w="6350" cap="flat" cmpd="sng" algn="ctr">
+                      <a:solidFill>
+                        <a:srgbClr val="E8C4C8"/>
+                      </a:solidFill>
+                    </a:lnT>
+                    <a:lnB w="6350" cap="flat" cmpd="sng" algn="ctr">
+                      <a:solidFill>
+                        <a:srgbClr val="E8C4C8"/>
+                      </a:solidFill>
+                    </a:lnB>
+                  </a:tcPr>
+                </a:tc>
+                <a:tc>
+                  <a:txBody>
+                    <a:bodyPr wrap="square"/>
+                    <a:lstStyle/>
+                    <a:p>
+                      <a:pPr algn="ctr">
+                        <a:lnSpc>
+                          <a:spcPct val="100000"/>
+                        </a:lnSpc>
+                        <a:spcBef>
+                          <a:spcPts val="0"/>
+                        </a:spcBef>
+                        <a:spcAft>
+                          <a:spcPts val="0"/>
+                        </a:spcAft>
+                      </a:pPr>
+                      <a:r>
+                        <a:rPr sz="600" b="1">
+                          <a:solidFill>
+                            <a:srgbClr val="FFFFFF"/>
+                          </a:solidFill>
+                          <a:latin typeface="Calibri"/>
+                        </a:rPr>
                         <a:t>04.28</a:t>
-                      </a:r>
-                    </a:p>
-                  </a:txBody>
-                  <a:tcPr anchor="ctr" marL="25400" marR="25400" marT="12700" marB="12700">
-                    <a:solidFill>
-                      <a:srgbClr val="570C17"/>
-                    </a:solidFill>
-                    <a:lnL w="6350" cap="flat" cmpd="sng" algn="ctr">
-                      <a:solidFill>
-                        <a:srgbClr val="E8C4C8"/>
-                      </a:solidFill>
-                    </a:lnL>
-                    <a:lnR w="6350" cap="flat" cmpd="sng" algn="ctr">
-                      <a:solidFill>
-                        <a:srgbClr val="E8C4C8"/>
-                      </a:solidFill>
-                    </a:lnR>
-                    <a:lnT w="6350" cap="flat" cmpd="sng" algn="ctr">
-                      <a:solidFill>
-                        <a:srgbClr val="E8C4C8"/>
-                      </a:solidFill>
-                    </a:lnT>
-                    <a:lnB w="6350" cap="flat" cmpd="sng" algn="ctr">
-                      <a:solidFill>
-                        <a:srgbClr val="E8C4C8"/>
-                      </a:solidFill>
-                    </a:lnB>
-                  </a:tcPr>
-                </a:tc>
-                <a:tc>
-                  <a:txBody>
-                    <a:bodyPr wrap="square"/>
-                    <a:lstStyle/>
-                    <a:p>
-                      <a:pPr algn="ctr">
-                        <a:lnSpc>
-                          <a:spcPct val="100000"/>
-                        </a:lnSpc>
-                        <a:spcBef>
-                          <a:spcPts val="0"/>
-                        </a:spcBef>
-                        <a:spcAft>
-                          <a:spcPts val="0"/>
-                        </a:spcAft>
-                      </a:pPr>
-                      <a:r>
-                        <a:rPr sz="600" b="1">
-                          <a:solidFill>
-                            <a:srgbClr val="FFFFFF"/>
-                          </a:solidFill>
-                          <a:latin typeface="Calibri"/>
-                        </a:rPr>
-                        <a:t>05.27</a:t>
-                      </a:r>
-                    </a:p>
-                  </a:txBody>
-                  <a:tcPr anchor="ctr" marL="25400" marR="25400" marT="12700" marB="12700">
-                    <a:solidFill>
-                      <a:srgbClr val="570C17"/>
-                    </a:solidFill>
-                    <a:lnL w="6350" cap="flat" cmpd="sng" algn="ctr">
-                      <a:solidFill>
-                        <a:srgbClr val="E8C4C8"/>
-                      </a:solidFill>
-                    </a:lnL>
-                    <a:lnR w="6350" cap="flat" cmpd="sng" algn="ctr">
-                      <a:solidFill>
-                        <a:srgbClr val="E8C4C8"/>
-                      </a:solidFill>
-                    </a:lnR>
-                    <a:lnT w="6350" cap="flat" cmpd="sng" algn="ctr">
-                      <a:solidFill>
-                        <a:srgbClr val="E8C4C8"/>
-                      </a:solidFill>
-                    </a:lnT>
-                    <a:lnB w="6350" cap="flat" cmpd="sng" algn="ctr">
-                      <a:solidFill>
-                        <a:srgbClr val="E8C4C8"/>
-                      </a:solidFill>
-                    </a:lnB>
-                  </a:tcPr>
-                </a:tc>
-                <a:tc>
-                  <a:txBody>
-                    <a:bodyPr wrap="square"/>
-                    <a:lstStyle/>
-                    <a:p>
-                      <a:pPr algn="ctr">
-                        <a:lnSpc>
-                          <a:spcPct val="100000"/>
-                        </a:lnSpc>
-                        <a:spcBef>
-                          <a:spcPts val="0"/>
-                        </a:spcBef>
-                        <a:spcAft>
-                          <a:spcPts val="0"/>
-                        </a:spcAft>
-                      </a:pPr>
-                      <a:r>
-                        <a:rPr sz="600" b="1">
-                          <a:solidFill>
-                            <a:srgbClr val="FFFFFF"/>
-                          </a:solidFill>
-                          <a:latin typeface="Calibri"/>
-                        </a:rPr>
-                        <a:t>06.27</a:t>
-                      </a:r>
-                    </a:p>
-                  </a:txBody>
-                  <a:tcPr anchor="ctr" marL="25400" marR="25400" marT="12700" marB="12700">
-                    <a:solidFill>
-                      <a:srgbClr val="570C17"/>
-                    </a:solidFill>
-                    <a:lnL w="6350" cap="flat" cmpd="sng" algn="ctr">
-                      <a:solidFill>
-                        <a:srgbClr val="E8C4C8"/>
-                      </a:solidFill>
-                    </a:lnL>
-                    <a:lnR w="6350" cap="flat" cmpd="sng" algn="ctr">
-                      <a:solidFill>
-                        <a:srgbClr val="E8C4C8"/>
-                      </a:solidFill>
-                    </a:lnR>
-                    <a:lnT w="6350" cap="flat" cmpd="sng" algn="ctr">
-                      <a:solidFill>
-                        <a:srgbClr val="E8C4C8"/>
-                      </a:solidFill>
-                    </a:lnT>
-                    <a:lnB w="6350" cap="flat" cmpd="sng" algn="ctr">
-                      <a:solidFill>
-                        <a:srgbClr val="E8C4C8"/>
-                      </a:solidFill>
-                    </a:lnB>
-                  </a:tcPr>
-                </a:tc>
-                <a:tc>
-                  <a:txBody>
-                    <a:bodyPr wrap="square"/>
-                    <a:lstStyle/>
-                    <a:p>
-                      <a:pPr algn="ctr">
-                        <a:lnSpc>
-                          <a:spcPct val="100000"/>
-                        </a:lnSpc>
-                        <a:spcBef>
-                          <a:spcPts val="0"/>
-                        </a:spcBef>
-                        <a:spcAft>
-                          <a:spcPts val="0"/>
-                        </a:spcAft>
-                      </a:pPr>
-                      <a:r>
-                        <a:rPr sz="600" b="1">
-                          <a:solidFill>
-                            <a:srgbClr val="FFFFFF"/>
-                          </a:solidFill>
-                          <a:latin typeface="Calibri"/>
-                        </a:rPr>
-                        <a:t>07.27</a:t>
-                      </a:r>
-                    </a:p>
-                  </a:txBody>
-                  <a:tcPr anchor="ctr" marL="25400" marR="25400" marT="12700" marB="12700">
-                    <a:solidFill>
-                      <a:srgbClr val="570C17"/>
-                    </a:solidFill>
-                    <a:lnL w="6350" cap="flat" cmpd="sng" algn="ctr">
-                      <a:solidFill>
-                        <a:srgbClr val="E8C4C8"/>
-                      </a:solidFill>
-                    </a:lnL>
-                    <a:lnR w="6350" cap="flat" cmpd="sng" algn="ctr">
-                      <a:solidFill>
-                        <a:srgbClr val="E8C4C8"/>
-                      </a:solidFill>
-                    </a:lnR>
-                    <a:lnT w="6350" cap="flat" cmpd="sng" algn="ctr">
-                      <a:solidFill>
-                        <a:srgbClr val="E8C4C8"/>
-                      </a:solidFill>
-                    </a:lnT>
-                    <a:lnB w="6350" cap="flat" cmpd="sng" algn="ctr">
-                      <a:solidFill>
-                        <a:srgbClr val="E8C4C8"/>
-                      </a:solidFill>
-                    </a:lnB>
-                  </a:tcPr>
-                </a:tc>
-                <a:tc>
-                  <a:txBody>
-                    <a:bodyPr wrap="square"/>
-                    <a:lstStyle/>
-                    <a:p>
-                      <a:pPr algn="ctr">
-                        <a:lnSpc>
-                          <a:spcPct val="100000"/>
-                        </a:lnSpc>
-                        <a:spcBef>
-                          <a:spcPts val="0"/>
-                        </a:spcBef>
-                        <a:spcAft>
-                          <a:spcPts val="0"/>
-                        </a:spcAft>
-                      </a:pPr>
-                      <a:r>
-                        <a:rPr sz="600" b="1">
-                          <a:solidFill>
-                            <a:srgbClr val="FFFFFF"/>
-                          </a:solidFill>
-                          <a:latin typeface="Calibri"/>
-                        </a:rPr>
-                        <a:t>08.27</a:t>
-                      </a:r>
-                    </a:p>
-                  </a:txBody>
-                  <a:tcPr anchor="ctr" marL="25400" marR="25400" marT="12700" marB="12700">
-                    <a:solidFill>
-                      <a:srgbClr val="570C17"/>
-                    </a:solidFill>
-                    <a:lnL w="6350" cap="flat" cmpd="sng" algn="ctr">
-                      <a:solidFill>
-                        <a:srgbClr val="E8C4C8"/>
-                      </a:solidFill>
-                    </a:lnL>
-                    <a:lnR w="6350" cap="flat" cmpd="sng" algn="ctr">
-                      <a:solidFill>
-                        <a:srgbClr val="E8C4C8"/>
-                      </a:solidFill>
-                    </a:lnR>
-                    <a:lnT w="6350" cap="flat" cmpd="sng" algn="ctr">
-                      <a:solidFill>
-                        <a:srgbClr val="E8C4C8"/>
-                      </a:solidFill>
-                    </a:lnT>
-                    <a:lnB w="6350" cap="flat" cmpd="sng" algn="ctr">
-                      <a:solidFill>
-                        <a:srgbClr val="E8C4C8"/>
-                      </a:solidFill>
-                    </a:lnB>
-                  </a:tcPr>
-                </a:tc>
-                <a:tc>
-                  <a:txBody>
-                    <a:bodyPr wrap="square"/>
-                    <a:lstStyle/>
-                    <a:p>
-                      <a:pPr algn="ctr">
-                        <a:lnSpc>
-                          <a:spcPct val="100000"/>
-                        </a:lnSpc>
-                        <a:spcBef>
-                          <a:spcPts val="0"/>
-                        </a:spcBef>
-                        <a:spcAft>
-                          <a:spcPts val="0"/>
-                        </a:spcAft>
-                      </a:pPr>
-                      <a:r>
-                        <a:rPr sz="600" b="1">
-                          <a:solidFill>
-                            <a:srgbClr val="FFFFFF"/>
-                          </a:solidFill>
-                          <a:latin typeface="Calibri"/>
-                        </a:rPr>
-                        <a:t>09.27</a:t>
                       </a:r>
                     </a:p>
                   </a:txBody>
@@ -31433,6 +31385,59 @@
                     <a:bodyPr wrap="square"/>
                     <a:lstStyle/>
                     <a:p>
+                      <a:pPr algn="ctr">
+                        <a:lnSpc>
+                          <a:spcPct val="100000"/>
+                        </a:lnSpc>
+                        <a:spcBef>
+                          <a:spcPts val="0"/>
+                        </a:spcBef>
+                        <a:spcAft>
+                          <a:spcPts val="0"/>
+                        </a:spcAft>
+                      </a:pPr>
+                      <a:r>
+                        <a:rPr sz="500" b="0">
+                          <a:solidFill>
+                            <a:srgbClr val="962837"/>
+                          </a:solidFill>
+                          <a:latin typeface="Calibri"/>
+                        </a:rPr>
+                        <a:t>КЦ</a:t>
+                      </a:r>
+                    </a:p>
+                  </a:txBody>
+                  <a:tcPr anchor="ctr" marL="25400" marR="25400" marT="12700" marB="12700">
+                    <a:solidFill>
+                      <a:srgbClr val="FFD2D8"/>
+                    </a:solidFill>
+                    <a:lnL w="6350" cap="flat" cmpd="sng" algn="ctr">
+                      <a:solidFill>
+                        <a:srgbClr val="E8C4C8"/>
+                      </a:solidFill>
+                    </a:lnL>
+                    <a:lnR w="6350" cap="flat" cmpd="sng" algn="ctr">
+                      <a:solidFill>
+                        <a:srgbClr val="E8C4C8"/>
+                      </a:solidFill>
+                    </a:lnR>
+                    <a:lnT w="6350" cap="flat" cmpd="sng" algn="ctr">
+                      <a:solidFill>
+                        <a:srgbClr val="E8C4C8"/>
+                      </a:solidFill>
+                    </a:lnT>
+                    <a:lnB w="6350" cap="flat" cmpd="sng" algn="ctr">
+                      <a:solidFill>
+                        <a:srgbClr val="E8C4C8"/>
+                      </a:solidFill>
+                    </a:lnB>
+                  </a:tcPr>
+                </a:tc>
+                <a:tc>
+                  <a:txBody>
+                    <a:bodyPr wrap="square"/>
+                    <a:lstStyle/>
+                    <a:p>
                       <a:pPr algn="l">
                         <a:lnSpc>
                           <a:spcPct val="100000"/>
@@ -31458,59 +31463,6 @@
                   <a:tcPr anchor="ctr" marL="25400" marR="25400" marT="12700" marB="12700">
                     <a:solidFill>
                       <a:srgbClr val="FCF8F9"/>
-                    </a:solidFill>
-                    <a:lnL w="6350" cap="flat" cmpd="sng" algn="ctr">
-                      <a:solidFill>
-                        <a:srgbClr val="E8C4C8"/>
-                      </a:solidFill>
-                    </a:lnL>
-                    <a:lnR w="6350" cap="flat" cmpd="sng" algn="ctr">
-                      <a:solidFill>
-                        <a:srgbClr val="E8C4C8"/>
-                      </a:solidFill>
-                    </a:lnR>
-                    <a:lnT w="6350" cap="flat" cmpd="sng" algn="ctr">
-                      <a:solidFill>
-                        <a:srgbClr val="E8C4C8"/>
-                      </a:solidFill>
-                    </a:lnT>
-                    <a:lnB w="6350" cap="flat" cmpd="sng" algn="ctr">
-                      <a:solidFill>
-                        <a:srgbClr val="E8C4C8"/>
-                      </a:solidFill>
-                    </a:lnB>
-                  </a:tcPr>
-                </a:tc>
-                <a:tc>
-                  <a:txBody>
-                    <a:bodyPr wrap="square"/>
-                    <a:lstStyle/>
-                    <a:p>
-                      <a:pPr algn="ctr">
-                        <a:lnSpc>
-                          <a:spcPct val="100000"/>
-                        </a:lnSpc>
-                        <a:spcBef>
-                          <a:spcPts val="0"/>
-                        </a:spcBef>
-                        <a:spcAft>
-                          <a:spcPts val="0"/>
-                        </a:spcAft>
-                      </a:pPr>
-                      <a:r>
-                        <a:rPr sz="500" b="0">
-                          <a:solidFill>
-                            <a:srgbClr val="962837"/>
-                          </a:solidFill>
-                          <a:latin typeface="Calibri"/>
-                        </a:rPr>
-                        <a:t>КЦ</a:t>
-                      </a:r>
-                    </a:p>
-                  </a:txBody>
-                  <a:tcPr anchor="ctr" marL="25400" marR="25400" marT="12700" marB="12700">
-                    <a:solidFill>
-                      <a:srgbClr val="FFD2D8"/>
                     </a:solidFill>
                     <a:lnL w="6350" cap="flat" cmpd="sng" algn="ctr">
                       <a:solidFill>
